--- a/Topic_B/Exam_Practice/TB-L12_Speaking_Workshop_Topic_B_Review_and_Four_Skills_Assessment.pptx
+++ b/Topic_B/Exam_Practice/TB-L12_Speaking_Workshop_Topic_B_Review_and_Four_Skills_Assessment.pptx
@@ -615,7 +615,11 @@
           <a:lstStyle/>
           <a:p>
             <a:r>
-              <a:rPr lang="en-US" dirty="0"/>
+              <a:rPr lang="ar-SA" dirty="0">
+                <a:latin typeface="Amiri" pitchFamily="2" charset="-78"/>
+                <a:ea typeface="Amiri" pitchFamily="2" charset="-78"/>
+                <a:cs typeface="Amiri" pitchFamily="2" charset="-78"/>
+              </a:rPr>
               <a:t>ROLE PLAY C (Develop) — inviting a friend for the weekend.
 SET-UP IN THE BREAKOUT ROOM: A = examiner (reads the left column ONLY — the questions, in order), B = candidate (sees the task column; Core may use the help column), C = observer (ticks the feedback checklist). 1 minute preparation, about 3 minutes speaking, 1 minute feedback, then rotate.
 Task ! is the unexpected question: in the exam the candidate has not seen it — the examiner should read it without warning.
@@ -707,7 +711,11 @@
           <a:lstStyle/>
           <a:p>
             <a:r>
-              <a:rPr lang="en-US" dirty="0"/>
+              <a:rPr lang="ar-SA" dirty="0">
+                <a:latin typeface="Amiri" pitchFamily="2" charset="-78"/>
+                <a:ea typeface="Amiri" pitchFamily="2" charset="-78"/>
+                <a:cs typeface="Amiri" pitchFamily="2" charset="-78"/>
+              </a:rPr>
               <a:t>ROLE PLAY D (Stretch) — a youth debate.
 SET-UP IN THE BREAKOUT ROOM: A = examiner (reads the left column ONLY — the questions, in order), B = candidate (sees the task column; Core may use the help column), C = observer (ticks the feedback checklist). 1 minute preparation, about 3 minutes speaking, 1 minute feedback, then rotate.
 Task ! is the unexpected question: in the exam the candidate has not seen it — the examiner should read it without warning.
@@ -1243,7 +1251,11 @@
           <a:lstStyle/>
           <a:p>
             <a:r>
-              <a:rPr lang="en-US" dirty="0"/>
+              <a:rPr lang="ar-SA" dirty="0">
+                <a:latin typeface="Amiri" pitchFamily="2" charset="-78"/>
+                <a:ea typeface="Amiri" pitchFamily="2" charset="-78"/>
+                <a:cs typeface="Amiri" pitchFamily="2" charset="-78"/>
+              </a:rPr>
               <a:t>TOPIC CONVERSATION — Core. Examiner asks the questions in order and may add “لِمَاذَا؟ / هَلْ يُمْكِنُ أَنْ تَشْرَحَ أَكْثَرَ؟” to push for more. Candidate aims for one full sentence per question.
 </a:t>
             </a:r>
@@ -1332,7 +1344,11 @@
           <a:lstStyle/>
           <a:p>
             <a:r>
-              <a:rPr lang="en-US" dirty="0"/>
+              <a:rPr lang="ar-SA" dirty="0">
+                <a:latin typeface="Amiri" pitchFamily="2" charset="-78"/>
+                <a:ea typeface="Amiri" pitchFamily="2" charset="-78"/>
+                <a:cs typeface="Amiri" pitchFamily="2" charset="-78"/>
+              </a:rPr>
               <a:t>TOPIC CONVERSATION — Develop. Examiner asks the questions in order and may add “لِمَاذَا؟ / هَلْ يُمْكِنُ أَنْ تَشْرَحَ أَكْثَرَ؟” to push for more. Candidate aims for two or three sentences, mixing time frames.
 </a:t>
             </a:r>
@@ -1421,7 +1437,11 @@
           <a:lstStyle/>
           <a:p>
             <a:r>
-              <a:rPr lang="en-US" dirty="0"/>
+              <a:rPr lang="ar-SA" dirty="0">
+                <a:latin typeface="Amiri" pitchFamily="2" charset="-78"/>
+                <a:ea typeface="Amiri" pitchFamily="2" charset="-78"/>
+                <a:cs typeface="Amiri" pitchFamily="2" charset="-78"/>
+              </a:rPr>
               <a:t>TOPIC CONVERSATION — Stretch. Examiner asks the questions in order and may add “لِمَاذَا؟ / هَلْ يُمْكِنُ أَنْ تَشْرَحَ أَكْثَرَ؟” to push for more. Candidate aims for a developed answer: opinion, comparison, concession and a conditional.
 </a:t>
             </a:r>
@@ -1510,7 +1530,11 @@
           <a:lstStyle/>
           <a:p>
             <a:r>
-              <a:rPr lang="en-US" dirty="0"/>
+              <a:rPr lang="ar-SA" dirty="0">
+                <a:latin typeface="Amiri" pitchFamily="2" charset="-78"/>
+                <a:ea typeface="Amiri" pitchFamily="2" charset="-78"/>
+                <a:cs typeface="Amiri" pitchFamily="2" charset="-78"/>
+              </a:rPr>
               <a:t>WELCOME (1 min) — while students join.
 • Greet each student by name as they arrive: السَّلَامُ عَلَيْكُمْ. Take the register (Pastoral Tracker: attendance 0/1).
 • 2-MINUTE CHECK-IN (SEND training): a private chat to any student who seemed unsettled last lesson — “Are you okay today? 👍 / 👎”.
@@ -2224,7 +2248,11 @@
           <a:lstStyle/>
           <a:p>
             <a:r>
-              <a:rPr lang="en-US" dirty="0"/>
+              <a:rPr lang="ar-SA" dirty="0">
+                <a:latin typeface="Amiri" pitchFamily="2" charset="-78"/>
+                <a:ea typeface="Amiri" pitchFamily="2" charset="-78"/>
+                <a:cs typeface="Amiri" pitchFamily="2" charset="-78"/>
+              </a:rPr>
               <a:t>TEACH (3 min). Role play = precise and complete; conversation = develop. Choral repetition of the repair phrases. To a girl: تُعِيدِي.</a:t>
             </a:r>
             <a:endParaRPr lang="en-US" dirty="0"/>
@@ -2576,7 +2604,11 @@
           <a:lstStyle/>
           <a:p>
             <a:r>
-              <a:rPr lang="en-US" dirty="0"/>
+              <a:rPr lang="ar-SA" dirty="0">
+                <a:latin typeface="Amiri" pitchFamily="2" charset="-78"/>
+                <a:ea typeface="Amiri" pitchFamily="2" charset="-78"/>
+                <a:cs typeface="Amiri" pitchFamily="2" charset="-78"/>
+              </a:rPr>
               <a:t>ROLE PLAY A (Core) — a youth hostel.
 SET-UP IN THE BREAKOUT ROOM: A = examiner (reads the left column ONLY — the questions, in order), B = candidate (sees the task column; Core may use the help column), C = observer (ticks the feedback checklist). 1 minute preparation, about 3 minutes speaking, 1 minute feedback, then rotate.
 Task ! is the unexpected question: in the exam the candidate has not seen it — the examiner should read it without warning.
@@ -2668,7 +2700,11 @@
           <a:lstStyle/>
           <a:p>
             <a:r>
-              <a:rPr lang="en-US" dirty="0"/>
+              <a:rPr lang="ar-SA" dirty="0">
+                <a:latin typeface="Amiri" pitchFamily="2" charset="-78"/>
+                <a:ea typeface="Amiri" pitchFamily="2" charset="-78"/>
+                <a:cs typeface="Amiri" pitchFamily="2" charset="-78"/>
+              </a:rPr>
               <a:t>ROLE PLAY B (Core+) — buying a present.
 SET-UP IN THE BREAKOUT ROOM: A = examiner (reads the left column ONLY — the questions, in order), B = candidate (sees the task column; Core may use the help column), C = observer (ticks the feedback checklist). 1 minute preparation, about 3 minutes speaking, 1 minute feedback, then rotate.
 Task ! is the unexpected question: in the exam the candidate has not seen it — the examiner should read it without warning.
@@ -3156,6 +3192,7 @@
                   <a:srgbClr val="D4AF37"/>
                 </a:solidFill>
                 <a:latin typeface="Amiri" pitchFamily="2" charset="-78"/>
+                <a:ea typeface="Amiri" pitchFamily="2" charset="-78"/>
                 <a:cs typeface="Amiri" pitchFamily="2" charset="-78"/>
               </a:rPr>
               <a:t>م</a:t>
@@ -3362,6 +3399,7 @@
                   <a:srgbClr val="D4AF37"/>
                 </a:solidFill>
                 <a:latin typeface="Amiri" pitchFamily="2" charset="-78"/>
+                <a:ea typeface="Amiri" pitchFamily="2" charset="-78"/>
                 <a:cs typeface="Amiri" pitchFamily="2" charset="-78"/>
               </a:rPr>
               <a:t>وَرْشَةُ التَّحَدُّثِ — امْتِحَانٌ تَجْرِيبِيٌّ</a:t>
@@ -3819,6 +3857,7 @@
                   <a:srgbClr val="D4AF37"/>
                 </a:solidFill>
                 <a:latin typeface="Amiri" pitchFamily="2" charset="-78"/>
+                <a:ea typeface="Amiri" pitchFamily="2" charset="-78"/>
                 <a:cs typeface="Amiri" pitchFamily="2" charset="-78"/>
               </a:rPr>
               <a:t>م</a:t>
@@ -4139,6 +4178,7 @@
                   <a:srgbClr val="8A6D1E"/>
                 </a:solidFill>
                 <a:latin typeface="Amiri" pitchFamily="2" charset="-78"/>
+                <a:ea typeface="Amiri" pitchFamily="2" charset="-78"/>
                 <a:cs typeface="Amiri" pitchFamily="2" charset="-78"/>
               </a:rPr>
               <a:t>عُطْلَةُ نِهَايَةِ الأُسْبُوعِ عِنْدِي</a:t>
@@ -4419,6 +4459,7 @@
                   <a:srgbClr val="1B3B6F"/>
                 </a:solidFill>
                 <a:latin typeface="Amiri" pitchFamily="2" charset="-78"/>
+                <a:ea typeface="Amiri" pitchFamily="2" charset="-78"/>
                 <a:cs typeface="Amiri" pitchFamily="2" charset="-78"/>
               </a:rPr>
               <a:t>أَدْعُوكَ إِلَى … هَلْ تَسْتَطِيعُ …؟</a:t>
@@ -4495,6 +4536,7 @@
                   <a:srgbClr val="1B3B6F"/>
                 </a:solidFill>
                 <a:latin typeface="Amiri" pitchFamily="2" charset="-78"/>
+                <a:ea typeface="Amiri" pitchFamily="2" charset="-78"/>
                 <a:cs typeface="Amiri" pitchFamily="2" charset="-78"/>
               </a:rPr>
               <a:t>أَهْلًا! كَيْفَ حَالُكَ؟</a:t>
@@ -4598,6 +4640,7 @@
                   <a:srgbClr val="1B3B6F"/>
                 </a:solidFill>
                 <a:latin typeface="Amiri" pitchFamily="2" charset="-78"/>
+                <a:ea typeface="Amiri" pitchFamily="2" charset="-78"/>
                 <a:cs typeface="Amiri" pitchFamily="2" charset="-78"/>
               </a:rPr>
               <a:t>سَتَنَامُ فِي … بِجَانِبِ … فِيهَا …</a:t>
@@ -4674,6 +4717,7 @@
                   <a:srgbClr val="1B3B6F"/>
                 </a:solidFill>
                 <a:latin typeface="Amiri" pitchFamily="2" charset="-78"/>
+                <a:ea typeface="Amiri" pitchFamily="2" charset="-78"/>
                 <a:cs typeface="Amiri" pitchFamily="2" charset="-78"/>
               </a:rPr>
               <a:t>بِكُلِّ سُرُورٍ! أَيْنَ سَأَنَامُ؟</a:t>
@@ -4777,6 +4821,7 @@
                   <a:srgbClr val="1B3B6F"/>
                 </a:solidFill>
                 <a:latin typeface="Amiri" pitchFamily="2" charset="-78"/>
+                <a:ea typeface="Amiri" pitchFamily="2" charset="-78"/>
                 <a:cs typeface="Amiri" pitchFamily="2" charset="-78"/>
               </a:rPr>
               <a:t>سَنَلْعَبُ … لِأَنَّ … وَسَنَذْهَبُ …</a:t>
@@ -4853,6 +4898,7 @@
                   <a:srgbClr val="1B3B6F"/>
                 </a:solidFill>
                 <a:latin typeface="Amiri" pitchFamily="2" charset="-78"/>
+                <a:ea typeface="Amiri" pitchFamily="2" charset="-78"/>
                 <a:cs typeface="Amiri" pitchFamily="2" charset="-78"/>
               </a:rPr>
               <a:t>وَمَاذَا سَنَفْعَلُ؟</a:t>
@@ -4956,6 +5002,7 @@
                   <a:srgbClr val="1B3B6F"/>
                 </a:solidFill>
                 <a:latin typeface="Amiri" pitchFamily="2" charset="-78"/>
+                <a:ea typeface="Amiri" pitchFamily="2" charset="-78"/>
                 <a:cs typeface="Amiri" pitchFamily="2" charset="-78"/>
               </a:rPr>
               <a:t>لَا تُحْضِرْ شَيْئًا … أُسْرَتِي …</a:t>
@@ -5032,6 +5079,7 @@
                   <a:srgbClr val="1B3B6F"/>
                 </a:solidFill>
                 <a:latin typeface="Amiri" pitchFamily="2" charset="-78"/>
+                <a:ea typeface="Amiri" pitchFamily="2" charset="-78"/>
                 <a:cs typeface="Amiri" pitchFamily="2" charset="-78"/>
               </a:rPr>
               <a:t>… هَلْ أُحْضِرُ شَيْئًا؟</a:t>
@@ -5135,6 +5183,7 @@
                   <a:srgbClr val="1B3B6F"/>
                 </a:solidFill>
                 <a:latin typeface="Amiri" pitchFamily="2" charset="-78"/>
+                <a:ea typeface="Amiri" pitchFamily="2" charset="-78"/>
                 <a:cs typeface="Amiri" pitchFamily="2" charset="-78"/>
               </a:rPr>
               <a:t>زُرْتُكَ فِي … وَكَانَ …</a:t>
@@ -5211,6 +5260,7 @@
                   <a:srgbClr val="1B3B6F"/>
                 </a:solidFill>
                 <a:latin typeface="Amiri" pitchFamily="2" charset="-78"/>
+                <a:ea typeface="Amiri" pitchFamily="2" charset="-78"/>
                 <a:cs typeface="Amiri" pitchFamily="2" charset="-78"/>
               </a:rPr>
               <a:t>مَتَى زُرْتَنِي آخِرَ مَرَّةٍ؟</a:t>
@@ -5420,6 +5470,7 @@
                   <a:srgbClr val="D4AF37"/>
                 </a:solidFill>
                 <a:latin typeface="Amiri" pitchFamily="2" charset="-78"/>
+                <a:ea typeface="Amiri" pitchFamily="2" charset="-78"/>
                 <a:cs typeface="Amiri" pitchFamily="2" charset="-78"/>
               </a:rPr>
               <a:t>م</a:t>
@@ -5740,6 +5791,7 @@
                   <a:srgbClr val="8A6D1E"/>
                 </a:solidFill>
                 <a:latin typeface="Amiri" pitchFamily="2" charset="-78"/>
+                <a:ea typeface="Amiri" pitchFamily="2" charset="-78"/>
                 <a:cs typeface="Amiri" pitchFamily="2" charset="-78"/>
               </a:rPr>
               <a:t>هَلْ تَتَغَيَّرُ الحَيَاةُ العَائِلِيَّةُ؟</a:t>
@@ -6020,6 +6072,7 @@
                   <a:srgbClr val="1B3B6F"/>
                 </a:solidFill>
                 <a:latin typeface="Amiri" pitchFamily="2" charset="-78"/>
+                <a:ea typeface="Amiri" pitchFamily="2" charset="-78"/>
                 <a:cs typeface="Amiri" pitchFamily="2" charset="-78"/>
               </a:rPr>
               <a:t>كَانَتِ العَائِلَاتُ … أَمَّا اليَوْمَ فَيَعِيشُ …</a:t>
@@ -6096,6 +6149,7 @@
                   <a:srgbClr val="1B3B6F"/>
                 </a:solidFill>
                 <a:latin typeface="Amiri" pitchFamily="2" charset="-78"/>
+                <a:ea typeface="Amiri" pitchFamily="2" charset="-78"/>
                 <a:cs typeface="Amiri" pitchFamily="2" charset="-78"/>
               </a:rPr>
               <a:t>كَيْفَ تَغَيَّرَتِ العَائِلَةُ فِي رَأْيِكَ؟</a:t>
@@ -6199,6 +6253,7 @@
                   <a:srgbClr val="1B3B6F"/>
                 </a:solidFill>
                 <a:latin typeface="Amiri" pitchFamily="2" charset="-78"/>
+                <a:ea typeface="Amiri" pitchFamily="2" charset="-78"/>
                 <a:cs typeface="Amiri" pitchFamily="2" charset="-78"/>
               </a:rPr>
               <a:t>مِنْ نَاحِيَةٍ … وَمِنْ نَاحِيَةٍ أُخْرَى …</a:t>
@@ -6275,6 +6330,7 @@
                   <a:srgbClr val="1B3B6F"/>
                 </a:solidFill>
                 <a:latin typeface="Amiri" pitchFamily="2" charset="-78"/>
+                <a:ea typeface="Amiri" pitchFamily="2" charset="-78"/>
                 <a:cs typeface="Amiri" pitchFamily="2" charset="-78"/>
               </a:rPr>
               <a:t>هَلْ هٰذَا التَّغْيِيرُ سَلْبِيٌّ؟</a:t>
@@ -6378,6 +6434,7 @@
                   <a:srgbClr val="1B3B6F"/>
                 </a:solidFill>
                 <a:latin typeface="Amiri" pitchFamily="2" charset="-78"/>
+                <a:ea typeface="Amiri" pitchFamily="2" charset="-78"/>
                 <a:cs typeface="Amiri" pitchFamily="2" charset="-78"/>
               </a:rPr>
               <a:t>فِي عَائِلَتِي مَثَلًا … فَأَصْبَحْنَا …</a:t>
@@ -6454,6 +6511,7 @@
                   <a:srgbClr val="1B3B6F"/>
                 </a:solidFill>
                 <a:latin typeface="Amiri" pitchFamily="2" charset="-78"/>
+                <a:ea typeface="Amiri" pitchFamily="2" charset="-78"/>
                 <a:cs typeface="Amiri" pitchFamily="2" charset="-78"/>
               </a:rPr>
               <a:t>أَعْطِنَا مِثَالًا مِنْ عَائِلَتِكَ.</a:t>
@@ -6557,6 +6615,7 @@
                   <a:srgbClr val="1B3B6F"/>
                 </a:solidFill>
                 <a:latin typeface="Amiri" pitchFamily="2" charset="-78"/>
+                <a:ea typeface="Amiri" pitchFamily="2" charset="-78"/>
                 <a:cs typeface="Amiri" pitchFamily="2" charset="-78"/>
               </a:rPr>
               <a:t>صَحِيحٌ أَنَّ … غَيْرَ أَنَّ …</a:t>
@@ -6633,6 +6692,7 @@
                   <a:srgbClr val="1B3B6F"/>
                 </a:solidFill>
                 <a:latin typeface="Amiri" pitchFamily="2" charset="-78"/>
+                <a:ea typeface="Amiri" pitchFamily="2" charset="-78"/>
                 <a:cs typeface="Amiri" pitchFamily="2" charset="-78"/>
               </a:rPr>
               <a:t>هَلْ تُقَرِّبُ التِّكْنُولُوجْيَا العَائِلَاتِ أَمْ تُبْعِدُهَا؟</a:t>
@@ -6736,6 +6796,7 @@
                   <a:srgbClr val="1B3B6F"/>
                 </a:solidFill>
                 <a:latin typeface="Amiri" pitchFamily="2" charset="-78"/>
+                <a:ea typeface="Amiri" pitchFamily="2" charset="-78"/>
                 <a:cs typeface="Amiri" pitchFamily="2" charset="-78"/>
               </a:rPr>
               <a:t>لَوْ وَضَعْتُ قَانُونًا، لَجَعَلْتُ …</a:t>
@@ -6812,6 +6873,7 @@
                   <a:srgbClr val="1B3B6F"/>
                 </a:solidFill>
                 <a:latin typeface="Amiri" pitchFamily="2" charset="-78"/>
+                <a:ea typeface="Amiri" pitchFamily="2" charset="-78"/>
                 <a:cs typeface="Amiri" pitchFamily="2" charset="-78"/>
               </a:rPr>
               <a:t>لَوْ وَضَعْتَ قَانُونًا لِلْعَائِلَاتِ، مَاذَا يَكُونُ؟</a:t>
@@ -7021,6 +7083,7 @@
                   <a:srgbClr val="D4AF37"/>
                 </a:solidFill>
                 <a:latin typeface="Amiri" pitchFamily="2" charset="-78"/>
+                <a:ea typeface="Amiri" pitchFamily="2" charset="-78"/>
                 <a:cs typeface="Amiri" pitchFamily="2" charset="-78"/>
               </a:rPr>
               <a:t>م</a:t>
@@ -7341,6 +7404,7 @@
                   <a:srgbClr val="8A6D1E"/>
                 </a:solidFill>
                 <a:latin typeface="Amiri" pitchFamily="2" charset="-78"/>
+                <a:ea typeface="Amiri" pitchFamily="2" charset="-78"/>
                 <a:cs typeface="Amiri" pitchFamily="2" charset="-78"/>
               </a:rPr>
               <a:t>وَرَقَةُ المُلَاحِظِ</a:t>
@@ -8811,6 +8875,7 @@
                   <a:srgbClr val="D4AF37"/>
                 </a:solidFill>
                 <a:latin typeface="Amiri" pitchFamily="2" charset="-78"/>
+                <a:ea typeface="Amiri" pitchFamily="2" charset="-78"/>
                 <a:cs typeface="Amiri" pitchFamily="2" charset="-78"/>
               </a:rPr>
               <a:t>م</a:t>
@@ -9131,6 +9196,7 @@
                   <a:srgbClr val="8A6D1E"/>
                 </a:solidFill>
                 <a:latin typeface="Amiri" pitchFamily="2" charset="-78"/>
+                <a:ea typeface="Amiri" pitchFamily="2" charset="-78"/>
                 <a:cs typeface="Amiri" pitchFamily="2" charset="-78"/>
               </a:rPr>
               <a:t>نَمُوذَجُ الإِجَابَةِ</a:t>
@@ -9373,6 +9439,7 @@
                   <a:srgbClr val="1B3B6F"/>
                 </a:solidFill>
                 <a:latin typeface="Amiri" pitchFamily="2" charset="-78"/>
+                <a:ea typeface="Amiri" pitchFamily="2" charset="-78"/>
                 <a:cs typeface="Amiri" pitchFamily="2" charset="-78"/>
               </a:rPr>
               <a:t>اسْمِي يُوسُفُ عَلِيٌّ، وَأَنَا بِرِيطَانِيٌّ.</a:t>
@@ -9449,6 +9516,7 @@
                   <a:srgbClr val="1B3B6F"/>
                 </a:solidFill>
                 <a:latin typeface="Amiri" pitchFamily="2" charset="-78"/>
+                <a:ea typeface="Amiri" pitchFamily="2" charset="-78"/>
                 <a:cs typeface="Amiri" pitchFamily="2" charset="-78"/>
               </a:rPr>
               <a:t>أَهْلًا! مَا اسْمُكَ؟ وَمَا جِنْسِيَّتُكَ؟</a:t>
@@ -9552,6 +9620,7 @@
                   <a:srgbClr val="1B3B6F"/>
                 </a:solidFill>
                 <a:latin typeface="Amiri" pitchFamily="2" charset="-78"/>
+                <a:ea typeface="Amiri" pitchFamily="2" charset="-78"/>
                 <a:cs typeface="Amiri" pitchFamily="2" charset="-78"/>
               </a:rPr>
               <a:t>أَنَا مَعَ ابْنِ عَمِّي، وَعُمْرُهُ سَبْعَ عَشْرَةَ سَنَةً.</a:t>
@@ -9628,6 +9697,7 @@
                   <a:srgbClr val="1B3B6F"/>
                 </a:solidFill>
                 <a:latin typeface="Amiri" pitchFamily="2" charset="-78"/>
+                <a:ea typeface="Amiri" pitchFamily="2" charset="-78"/>
                 <a:cs typeface="Amiri" pitchFamily="2" charset="-78"/>
               </a:rPr>
               <a:t>مَعَ مَنْ أَنْتَ؟</a:t>
@@ -9731,6 +9801,7 @@
                   <a:srgbClr val="1B3B6F"/>
                 </a:solidFill>
                 <a:latin typeface="Amiri" pitchFamily="2" charset="-78"/>
+                <a:ea typeface="Amiri" pitchFamily="2" charset="-78"/>
                 <a:cs typeface="Amiri" pitchFamily="2" charset="-78"/>
               </a:rPr>
               <a:t>غُرْفَةً هَادِئَةً، فِيهَا سَرِيرَانِ وَحَمَّامٌ.</a:t>
@@ -9807,6 +9878,7 @@
                   <a:srgbClr val="1B3B6F"/>
                 </a:solidFill>
                 <a:latin typeface="Amiri" pitchFamily="2" charset="-78"/>
+                <a:ea typeface="Amiri" pitchFamily="2" charset="-78"/>
                 <a:cs typeface="Amiri" pitchFamily="2" charset="-78"/>
               </a:rPr>
               <a:t>أَيَّ غُرْفَةٍ تُرِيدُ؟</a:t>
@@ -9910,6 +9982,7 @@
                   <a:srgbClr val="1B3B6F"/>
                 </a:solidFill>
                 <a:latin typeface="Amiri" pitchFamily="2" charset="-78"/>
+                <a:ea typeface="Amiri" pitchFamily="2" charset="-78"/>
                 <a:cs typeface="Amiri" pitchFamily="2" charset="-78"/>
               </a:rPr>
               <a:t>حَقِيبَتِي كَبِيرَةٌ وَزَرْقَاءُ، وَعَلَيْهَا شَرِيطٌ أَحْمَرُ.</a:t>
@@ -9986,6 +10059,7 @@
                   <a:srgbClr val="1B3B6F"/>
                 </a:solidFill>
                 <a:latin typeface="Amiri" pitchFamily="2" charset="-78"/>
+                <a:ea typeface="Amiri" pitchFamily="2" charset="-78"/>
                 <a:cs typeface="Amiri" pitchFamily="2" charset="-78"/>
               </a:rPr>
               <a:t>كَيْفَ أَعْرِفُ حَقِيبَتَكَ فِي المَخْزَنِ؟</a:t>
@@ -10089,6 +10163,7 @@
                   <a:srgbClr val="1B3B6F"/>
                 </a:solidFill>
                 <a:latin typeface="Amiri" pitchFamily="2" charset="-78"/>
+                <a:ea typeface="Amiri" pitchFamily="2" charset="-78"/>
                 <a:cs typeface="Amiri" pitchFamily="2" charset="-78"/>
               </a:rPr>
               <a:t>أُحِبُّ أَنْ أَزُورَ المَتَاحِفَ، لِأَنِّي أُحِبُّ التَّارِيخَ.</a:t>
@@ -10165,6 +10240,7 @@
                   <a:srgbClr val="1B3B6F"/>
                 </a:solidFill>
                 <a:latin typeface="Amiri" pitchFamily="2" charset="-78"/>
+                <a:ea typeface="Amiri" pitchFamily="2" charset="-78"/>
                 <a:cs typeface="Amiri" pitchFamily="2" charset="-78"/>
               </a:rPr>
               <a:t>مَاذَا تُحِبُّ أَنْ تَفْعَلَ فِي المَدِينَةِ؟</a:t>
@@ -10374,6 +10450,7 @@
                   <a:srgbClr val="D4AF37"/>
                 </a:solidFill>
                 <a:latin typeface="Amiri" pitchFamily="2" charset="-78"/>
+                <a:ea typeface="Amiri" pitchFamily="2" charset="-78"/>
                 <a:cs typeface="Amiri" pitchFamily="2" charset="-78"/>
               </a:rPr>
               <a:t>م</a:t>
@@ -10694,6 +10771,7 @@
                   <a:srgbClr val="8A6D1E"/>
                 </a:solidFill>
                 <a:latin typeface="Amiri" pitchFamily="2" charset="-78"/>
+                <a:ea typeface="Amiri" pitchFamily="2" charset="-78"/>
                 <a:cs typeface="Amiri" pitchFamily="2" charset="-78"/>
               </a:rPr>
               <a:t>نَمُوذَجُ الإِجَابَةِ</a:t>
@@ -10936,6 +11014,7 @@
                   <a:srgbClr val="1B3B6F"/>
                 </a:solidFill>
                 <a:latin typeface="Amiri" pitchFamily="2" charset="-78"/>
+                <a:ea typeface="Amiri" pitchFamily="2" charset="-78"/>
                 <a:cs typeface="Amiri" pitchFamily="2" charset="-78"/>
               </a:rPr>
               <a:t>أُرِيدُ هَدِيَّةً لِأُخْتِي، لِأَنَّ عِيدَ مِيلَادِهَا غَدًا.</a:t>
@@ -11012,6 +11091,7 @@
                   <a:srgbClr val="1B3B6F"/>
                 </a:solidFill>
                 <a:latin typeface="Amiri" pitchFamily="2" charset="-78"/>
+                <a:ea typeface="Amiri" pitchFamily="2" charset="-78"/>
                 <a:cs typeface="Amiri" pitchFamily="2" charset="-78"/>
               </a:rPr>
               <a:t>أَهْلًا، تَفَضَّلْ.</a:t>
@@ -11115,6 +11195,7 @@
                   <a:srgbClr val="1B3B6F"/>
                 </a:solidFill>
                 <a:latin typeface="Amiri" pitchFamily="2" charset="-78"/>
+                <a:ea typeface="Amiri" pitchFamily="2" charset="-78"/>
                 <a:cs typeface="Amiri" pitchFamily="2" charset="-78"/>
               </a:rPr>
               <a:t>عُمْرُهَا اثْنَتَا عَشْرَةَ سَنَةً، وَتُحِبُّ الرَّسْمَ وَالمُوضَةَ.</a:t>
@@ -11191,6 +11272,7 @@
                   <a:srgbClr val="1B3B6F"/>
                 </a:solidFill>
                 <a:latin typeface="Amiri" pitchFamily="2" charset="-78"/>
+                <a:ea typeface="Amiri" pitchFamily="2" charset="-78"/>
                 <a:cs typeface="Amiri" pitchFamily="2" charset="-78"/>
               </a:rPr>
               <a:t>كَمْ عُمْرُهَا؟ وَمَاذَا تُحِبُّ؟</a:t>
@@ -11294,6 +11376,7 @@
                   <a:srgbClr val="1B3B6F"/>
                 </a:solidFill>
                 <a:latin typeface="Amiri" pitchFamily="2" charset="-78"/>
+                <a:ea typeface="Amiri" pitchFamily="2" charset="-78"/>
                 <a:cs typeface="Amiri" pitchFamily="2" charset="-78"/>
               </a:rPr>
               <a:t>بِكَمْ هٰذِهِ؟ وَبِكَمْ تِلْكَ؟ … إِذَنِ الوَرْدِيَّةُ أَرْخَصُ مِنَ البَيْضَاءِ.</a:t>
@@ -11373,6 +11456,7 @@
                   <a:srgbClr val="1B3B6F"/>
                 </a:solidFill>
                 <a:latin typeface="Amiri" pitchFamily="2" charset="-78"/>
+                <a:ea typeface="Amiri" pitchFamily="2" charset="-78"/>
                 <a:cs typeface="Amiri" pitchFamily="2" charset="-78"/>
               </a:rPr>
               <a:t>عِنْدَنَا هٰذِهِ الحَقِيبَةُ الوَرْدِيَّةُ وَتِلْكَ الحَقِيبَةُ البَيْضَاءُ.</a:t>
@@ -11476,6 +11560,7 @@
                   <a:srgbClr val="1B3B6F"/>
                 </a:solidFill>
                 <a:latin typeface="Amiri" pitchFamily="2" charset="-78"/>
+                <a:ea typeface="Amiri" pitchFamily="2" charset="-78"/>
                 <a:cs typeface="Amiri" pitchFamily="2" charset="-78"/>
               </a:rPr>
               <a:t>نَعَمْ، مِنْ فَضْلِكَ، بِوَرَقٍ أَزْرَقَ، لِأَنَّهُ لَوْنُهَا المُفَضَّلُ.</a:t>
@@ -11552,6 +11637,7 @@
                   <a:srgbClr val="1B3B6F"/>
                 </a:solidFill>
                 <a:latin typeface="Amiri" pitchFamily="2" charset="-78"/>
+                <a:ea typeface="Amiri" pitchFamily="2" charset="-78"/>
                 <a:cs typeface="Amiri" pitchFamily="2" charset="-78"/>
               </a:rPr>
               <a:t>هَلْ تُرِيدُ أَنْ نُغَلِّفَهَا؟</a:t>
@@ -11655,6 +11741,7 @@
                   <a:srgbClr val="1B3B6F"/>
                 </a:solidFill>
                 <a:latin typeface="Amiri" pitchFamily="2" charset="-78"/>
+                <a:ea typeface="Amiri" pitchFamily="2" charset="-78"/>
                 <a:cs typeface="Amiri" pitchFamily="2" charset="-78"/>
               </a:rPr>
               <a:t>أَوَّلًا سَنَأْكُلُ فِي مَطْعَمٍ، ثُمَّ سَنَرْجِعُ إِلَى البَيْتِ وَنَقْطَعُ الكَعْكَةَ.</a:t>
@@ -11731,6 +11818,7 @@
                   <a:srgbClr val="1B3B6F"/>
                 </a:solidFill>
                 <a:latin typeface="Amiri" pitchFamily="2" charset="-78"/>
+                <a:ea typeface="Amiri" pitchFamily="2" charset="-78"/>
                 <a:cs typeface="Amiri" pitchFamily="2" charset="-78"/>
               </a:rPr>
               <a:t>كَيْفَ سَتَحْتَفِلُونَ؟</a:t>
@@ -11940,6 +12028,7 @@
                   <a:srgbClr val="D4AF37"/>
                 </a:solidFill>
                 <a:latin typeface="Amiri" pitchFamily="2" charset="-78"/>
+                <a:ea typeface="Amiri" pitchFamily="2" charset="-78"/>
                 <a:cs typeface="Amiri" pitchFamily="2" charset="-78"/>
               </a:rPr>
               <a:t>م</a:t>
@@ -12260,6 +12349,7 @@
                   <a:srgbClr val="8A6D1E"/>
                 </a:solidFill>
                 <a:latin typeface="Amiri" pitchFamily="2" charset="-78"/>
+                <a:ea typeface="Amiri" pitchFamily="2" charset="-78"/>
                 <a:cs typeface="Amiri" pitchFamily="2" charset="-78"/>
               </a:rPr>
               <a:t>نَمُوذَجُ الإِجَابَةِ</a:t>
@@ -12502,6 +12592,7 @@
                   <a:srgbClr val="1B3B6F"/>
                 </a:solidFill>
                 <a:latin typeface="Amiri" pitchFamily="2" charset="-78"/>
+                <a:ea typeface="Amiri" pitchFamily="2" charset="-78"/>
                 <a:cs typeface="Amiri" pitchFamily="2" charset="-78"/>
               </a:rPr>
               <a:t>أَهْلًا! أَدْعُوكَ إِلَى بَيْتِنَا فِي نِهَايَةِ الأُسْبُوعِ، فَهَلْ تَسْتَطِيعُ أَنْ تَأْتِيَ؟</a:t>
@@ -12578,6 +12669,7 @@
                   <a:srgbClr val="1B3B6F"/>
                 </a:solidFill>
                 <a:latin typeface="Amiri" pitchFamily="2" charset="-78"/>
+                <a:ea typeface="Amiri" pitchFamily="2" charset="-78"/>
                 <a:cs typeface="Amiri" pitchFamily="2" charset="-78"/>
               </a:rPr>
               <a:t>أَهْلًا! كَيْفَ حَالُكَ؟</a:t>
@@ -12681,6 +12773,7 @@
                   <a:srgbClr val="1B3B6F"/>
                 </a:solidFill>
                 <a:latin typeface="Amiri" pitchFamily="2" charset="-78"/>
+                <a:ea typeface="Amiri" pitchFamily="2" charset="-78"/>
                 <a:cs typeface="Amiri" pitchFamily="2" charset="-78"/>
               </a:rPr>
               <a:t>سَتَنَامُ فِي غُرْفَتِي، فِيهَا سَرِيرَانِ، وَهِيَ بِجَانِبِ الحَمَّامِ.</a:t>
@@ -12757,6 +12850,7 @@
                   <a:srgbClr val="1B3B6F"/>
                 </a:solidFill>
                 <a:latin typeface="Amiri" pitchFamily="2" charset="-78"/>
+                <a:ea typeface="Amiri" pitchFamily="2" charset="-78"/>
                 <a:cs typeface="Amiri" pitchFamily="2" charset="-78"/>
               </a:rPr>
               <a:t>بِكُلِّ سُرُورٍ! أَيْنَ سَأَنَامُ؟</a:t>
@@ -12860,6 +12954,7 @@
                   <a:srgbClr val="1B3B6F"/>
                 </a:solidFill>
                 <a:latin typeface="Amiri" pitchFamily="2" charset="-78"/>
+                <a:ea typeface="Amiri" pitchFamily="2" charset="-78"/>
                 <a:cs typeface="Amiri" pitchFamily="2" charset="-78"/>
               </a:rPr>
               <a:t>سَنَلْعَبُ كُرَةَ السَّلَّةِ فِي الحَدِيقَةِ، لِأَنَّكَ تُحِبُّهَا، ثُمَّ سَنَذْهَبُ إِلَى السِّينَمَا يَوْمَ السَّبْتِ.</a:t>
@@ -12936,6 +13031,7 @@
                   <a:srgbClr val="1B3B6F"/>
                 </a:solidFill>
                 <a:latin typeface="Amiri" pitchFamily="2" charset="-78"/>
+                <a:ea typeface="Amiri" pitchFamily="2" charset="-78"/>
                 <a:cs typeface="Amiri" pitchFamily="2" charset="-78"/>
               </a:rPr>
               <a:t>وَمَاذَا سَنَفْعَلُ؟</a:t>
@@ -13039,6 +13135,7 @@
                   <a:srgbClr val="1B3B6F"/>
                 </a:solidFill>
                 <a:latin typeface="Amiri" pitchFamily="2" charset="-78"/>
+                <a:ea typeface="Amiri" pitchFamily="2" charset="-78"/>
                 <a:cs typeface="Amiri" pitchFamily="2" charset="-78"/>
               </a:rPr>
               <a:t>لَا تُحْضِرْ شَيْئًا! أُسْرَتِي لَطِيفَةٌ جِدًّا، وَأُمِّي سَتَطْبُخُ لَنَا المَنْسَفَ.</a:t>
@@ -13115,6 +13212,7 @@
                   <a:srgbClr val="1B3B6F"/>
                 </a:solidFill>
                 <a:latin typeface="Amiri" pitchFamily="2" charset="-78"/>
+                <a:ea typeface="Amiri" pitchFamily="2" charset="-78"/>
                 <a:cs typeface="Amiri" pitchFamily="2" charset="-78"/>
               </a:rPr>
               <a:t>… هَلْ أُحْضِرُ شَيْئًا؟</a:t>
@@ -13218,6 +13316,7 @@
                   <a:srgbClr val="1B3B6F"/>
                 </a:solidFill>
                 <a:latin typeface="Amiri" pitchFamily="2" charset="-78"/>
+                <a:ea typeface="Amiri" pitchFamily="2" charset="-78"/>
                 <a:cs typeface="Amiri" pitchFamily="2" charset="-78"/>
               </a:rPr>
               <a:t>زُرْتُكَ فِي العِيدِ المَاضِي، وَكَانَ يَوْمًا رَائِعًا، خُصُوصًا عِنْدَمَا ضِعْنَا فِي السُّوقِ القَدِيمِ!</a:t>
@@ -13294,6 +13393,7 @@
                   <a:srgbClr val="1B3B6F"/>
                 </a:solidFill>
                 <a:latin typeface="Amiri" pitchFamily="2" charset="-78"/>
+                <a:ea typeface="Amiri" pitchFamily="2" charset="-78"/>
                 <a:cs typeface="Amiri" pitchFamily="2" charset="-78"/>
               </a:rPr>
               <a:t>مَتَى زُرْتَنِي آخِرَ مَرَّةٍ؟</a:t>
@@ -13503,6 +13603,7 @@
                   <a:srgbClr val="D4AF37"/>
                 </a:solidFill>
                 <a:latin typeface="Amiri" pitchFamily="2" charset="-78"/>
+                <a:ea typeface="Amiri" pitchFamily="2" charset="-78"/>
                 <a:cs typeface="Amiri" pitchFamily="2" charset="-78"/>
               </a:rPr>
               <a:t>م</a:t>
@@ -13823,6 +13924,7 @@
                   <a:srgbClr val="8A6D1E"/>
                 </a:solidFill>
                 <a:latin typeface="Amiri" pitchFamily="2" charset="-78"/>
+                <a:ea typeface="Amiri" pitchFamily="2" charset="-78"/>
                 <a:cs typeface="Amiri" pitchFamily="2" charset="-78"/>
               </a:rPr>
               <a:t>نَمُوذَجُ الإِجَابَةِ</a:t>
@@ -14065,6 +14167,7 @@
                   <a:srgbClr val="1B3B6F"/>
                 </a:solidFill>
                 <a:latin typeface="Amiri" pitchFamily="2" charset="-78"/>
+                <a:ea typeface="Amiri" pitchFamily="2" charset="-78"/>
                 <a:cs typeface="Amiri" pitchFamily="2" charset="-78"/>
               </a:rPr>
               <a:t>كَانَتِ العَائِلَاتُ كَبِيرَةً وَتَعِيشُ مَعًا، أَمَّا اليَوْمَ فَيَعِيشُ أَفْرَادُهَا فِي مُدُنٍ وَبُلْدَانٍ مُخْتَلِفَةٍ.</a:t>
@@ -14141,6 +14244,7 @@
                   <a:srgbClr val="1B3B6F"/>
                 </a:solidFill>
                 <a:latin typeface="Amiri" pitchFamily="2" charset="-78"/>
+                <a:ea typeface="Amiri" pitchFamily="2" charset="-78"/>
                 <a:cs typeface="Amiri" pitchFamily="2" charset="-78"/>
               </a:rPr>
               <a:t>كَيْفَ تَغَيَّرَتِ العَائِلَةُ فِي رَأْيِكَ؟</a:t>
@@ -14244,6 +14348,7 @@
                   <a:srgbClr val="1B3B6F"/>
                 </a:solidFill>
                 <a:latin typeface="Amiri" pitchFamily="2" charset="-78"/>
+                <a:ea typeface="Amiri" pitchFamily="2" charset="-78"/>
                 <a:cs typeface="Amiri" pitchFamily="2" charset="-78"/>
               </a:rPr>
               <a:t>مِنْ نَاحِيَةٍ نَفْتَقِدُ الأَجْدَادَ وَالأَقَارِبَ، وَمِنْ نَاحِيَةٍ أُخْرَى أَصْبَحَ الشَّبَابُ أَكْثَرَ اسْتِقْلَالًا.</a:t>
@@ -14320,6 +14425,7 @@
                   <a:srgbClr val="1B3B6F"/>
                 </a:solidFill>
                 <a:latin typeface="Amiri" pitchFamily="2" charset="-78"/>
+                <a:ea typeface="Amiri" pitchFamily="2" charset="-78"/>
                 <a:cs typeface="Amiri" pitchFamily="2" charset="-78"/>
               </a:rPr>
               <a:t>هَلْ هٰذَا التَّغْيِيرُ سَلْبِيٌّ؟</a:t>
@@ -14423,6 +14529,7 @@
                   <a:srgbClr val="1B3B6F"/>
                 </a:solidFill>
                 <a:latin typeface="Amiri" pitchFamily="2" charset="-78"/>
+                <a:ea typeface="Amiri" pitchFamily="2" charset="-78"/>
                 <a:cs typeface="Amiri" pitchFamily="2" charset="-78"/>
               </a:rPr>
               <a:t>فِي عَائِلَتِي مَثَلًا هَاجَرَ خَالِي إِلَى كَنَدَا قَبْلَ عَشْرِ سَنَوَاتٍ، فَأَصْبَحْنَا نَلْتَقِي عَلَى الشَّاشَةِ كُلَّ جُمُعَةٍ.</a:t>
@@ -14499,6 +14606,7 @@
                   <a:srgbClr val="1B3B6F"/>
                 </a:solidFill>
                 <a:latin typeface="Amiri" pitchFamily="2" charset="-78"/>
+                <a:ea typeface="Amiri" pitchFamily="2" charset="-78"/>
                 <a:cs typeface="Amiri" pitchFamily="2" charset="-78"/>
               </a:rPr>
               <a:t>أَعْطِنَا مِثَالًا مِنْ عَائِلَتِكَ.</a:t>
@@ -14602,6 +14710,7 @@
                   <a:srgbClr val="1B3B6F"/>
                 </a:solidFill>
                 <a:latin typeface="Amiri" pitchFamily="2" charset="-78"/>
+                <a:ea typeface="Amiri" pitchFamily="2" charset="-78"/>
                 <a:cs typeface="Amiri" pitchFamily="2" charset="-78"/>
               </a:rPr>
               <a:t>صَحِيحٌ أَنَّهَا تَجْمَعُ البَعِيدِينَ، غَيْرَ أَنَّهَا قَدْ تُبْعِدُ القَرِيبِينَ، فَنَجْلِسُ فِي غُرْفَةٍ وَاحِدَةٍ وَكُلٌّ عَلَى هَاتِفِهِ.</a:t>
@@ -14678,6 +14787,7 @@
                   <a:srgbClr val="1B3B6F"/>
                 </a:solidFill>
                 <a:latin typeface="Amiri" pitchFamily="2" charset="-78"/>
+                <a:ea typeface="Amiri" pitchFamily="2" charset="-78"/>
                 <a:cs typeface="Amiri" pitchFamily="2" charset="-78"/>
               </a:rPr>
               <a:t>هَلْ تُقَرِّبُ التِّكْنُولُوجْيَا العَائِلَاتِ أَمْ تُبْعِدُهَا؟</a:t>
@@ -14781,6 +14891,7 @@
                   <a:srgbClr val="1B3B6F"/>
                 </a:solidFill>
                 <a:latin typeface="Amiri" pitchFamily="2" charset="-78"/>
+                <a:ea typeface="Amiri" pitchFamily="2" charset="-78"/>
                 <a:cs typeface="Amiri" pitchFamily="2" charset="-78"/>
               </a:rPr>
               <a:t>لَوْ وَضَعْتُ قَانُونًا، لَجَعَلْتُ يَوْمَ الجُمُعَةِ يَوْمًا عَائِلِيًّا، يَأْكُلُ فِيهِ الجَمِيعُ مَعًا بِلَا شَاشَاتٍ.</a:t>
@@ -14857,6 +14968,7 @@
                   <a:srgbClr val="1B3B6F"/>
                 </a:solidFill>
                 <a:latin typeface="Amiri" pitchFamily="2" charset="-78"/>
+                <a:ea typeface="Amiri" pitchFamily="2" charset="-78"/>
                 <a:cs typeface="Amiri" pitchFamily="2" charset="-78"/>
               </a:rPr>
               <a:t>لَوْ وَضَعْتَ قَانُونًا لِلْعَائِلَاتِ، مَاذَا يَكُونُ؟</a:t>
@@ -15066,6 +15178,7 @@
                   <a:srgbClr val="D4AF37"/>
                 </a:solidFill>
                 <a:latin typeface="Amiri" pitchFamily="2" charset="-78"/>
+                <a:ea typeface="Amiri" pitchFamily="2" charset="-78"/>
                 <a:cs typeface="Amiri" pitchFamily="2" charset="-78"/>
               </a:rPr>
               <a:t>م</a:t>
@@ -15386,6 +15499,7 @@
                   <a:srgbClr val="8A6D1E"/>
                 </a:solidFill>
                 <a:latin typeface="Amiri" pitchFamily="2" charset="-78"/>
+                <a:ea typeface="Amiri" pitchFamily="2" charset="-78"/>
                 <a:cs typeface="Amiri" pitchFamily="2" charset="-78"/>
               </a:rPr>
               <a:t>حَيَاتِي الشَّخْصِيَّةُ</a:t>
@@ -15666,6 +15780,7 @@
                   <a:srgbClr val="1B3B6F"/>
                 </a:solidFill>
                 <a:latin typeface="Amiri" pitchFamily="2" charset="-78"/>
+                <a:ea typeface="Amiri" pitchFamily="2" charset="-78"/>
                 <a:cs typeface="Amiri" pitchFamily="2" charset="-78"/>
               </a:rPr>
               <a:t>اسْمِي … عُمْرِي … أَنَا …</a:t>
@@ -15742,6 +15857,7 @@
                   <a:srgbClr val="1B3B6F"/>
                 </a:solidFill>
                 <a:latin typeface="Amiri" pitchFamily="2" charset="-78"/>
+                <a:ea typeface="Amiri" pitchFamily="2" charset="-78"/>
                 <a:cs typeface="Amiri" pitchFamily="2" charset="-78"/>
               </a:rPr>
               <a:t>عَرِّفْنَا بِنَفْسِكَ.</a:t>
@@ -15910,6 +16026,7 @@
                   <a:srgbClr val="1B3B6F"/>
                 </a:solidFill>
                 <a:latin typeface="Amiri" pitchFamily="2" charset="-78"/>
+                <a:ea typeface="Amiri" pitchFamily="2" charset="-78"/>
                 <a:cs typeface="Amiri" pitchFamily="2" charset="-78"/>
               </a:rPr>
               <a:t>… طَوِيلٌ / قَصِيرَةٌ … وَهُوَ / هِيَ …</a:t>
@@ -15986,6 +16103,7 @@
                   <a:srgbClr val="1B3B6F"/>
                 </a:solidFill>
                 <a:latin typeface="Amiri" pitchFamily="2" charset="-78"/>
+                <a:ea typeface="Amiri" pitchFamily="2" charset="-78"/>
                 <a:cs typeface="Amiri" pitchFamily="2" charset="-78"/>
               </a:rPr>
               <a:t>صِفْ أَحَدَ أَفْرَادِ أُسْرَتِكَ.</a:t>
@@ -16154,6 +16272,7 @@
                   <a:srgbClr val="1B3B6F"/>
                 </a:solidFill>
                 <a:latin typeface="Amiri" pitchFamily="2" charset="-78"/>
+                <a:ea typeface="Amiri" pitchFamily="2" charset="-78"/>
                 <a:cs typeface="Amiri" pitchFamily="2" charset="-78"/>
               </a:rPr>
               <a:t>يُوجَدُ … وَتُوجَدُ …</a:t>
@@ -16230,6 +16349,7 @@
                   <a:srgbClr val="1B3B6F"/>
                 </a:solidFill>
                 <a:latin typeface="Amiri" pitchFamily="2" charset="-78"/>
+                <a:ea typeface="Amiri" pitchFamily="2" charset="-78"/>
                 <a:cs typeface="Amiri" pitchFamily="2" charset="-78"/>
               </a:rPr>
               <a:t>مَاذَا يُوجَدُ فِي غُرْفَتِكَ؟</a:t>
@@ -16398,6 +16518,7 @@
                   <a:srgbClr val="1B3B6F"/>
                 </a:solidFill>
                 <a:latin typeface="Amiri" pitchFamily="2" charset="-78"/>
+                <a:ea typeface="Amiri" pitchFamily="2" charset="-78"/>
                 <a:cs typeface="Amiri" pitchFamily="2" charset="-78"/>
               </a:rPr>
               <a:t>أُحِبُّ … لِأَنَّ …</a:t>
@@ -16474,6 +16595,7 @@
                   <a:srgbClr val="1B3B6F"/>
                 </a:solidFill>
                 <a:latin typeface="Amiri" pitchFamily="2" charset="-78"/>
+                <a:ea typeface="Amiri" pitchFamily="2" charset="-78"/>
                 <a:cs typeface="Amiri" pitchFamily="2" charset="-78"/>
               </a:rPr>
               <a:t>مَا مَلَابِسُكَ المُفَضَّلَةُ؟</a:t>
@@ -16642,6 +16764,7 @@
                   <a:srgbClr val="1B3B6F"/>
                 </a:solidFill>
                 <a:latin typeface="Amiri" pitchFamily="2" charset="-78"/>
+                <a:ea typeface="Amiri" pitchFamily="2" charset="-78"/>
                 <a:cs typeface="Amiri" pitchFamily="2" charset="-78"/>
               </a:rPr>
               <a:t>أَلْعَبُ … / أَزُورُ …</a:t>
@@ -16718,6 +16841,7 @@
                   <a:srgbClr val="1B3B6F"/>
                 </a:solidFill>
                 <a:latin typeface="Amiri" pitchFamily="2" charset="-78"/>
+                <a:ea typeface="Amiri" pitchFamily="2" charset="-78"/>
                 <a:cs typeface="Amiri" pitchFamily="2" charset="-78"/>
               </a:rPr>
               <a:t>مَاذَا تَفْعَلُ فِي نِهَايَةِ الأُسْبُوعِ؟</a:t>
@@ -16872,6 +16996,7 @@
                   <a:srgbClr val="1B3B6F"/>
                 </a:solidFill>
                 <a:latin typeface="Amiri" pitchFamily="2" charset="-78"/>
+                <a:ea typeface="Amiri" pitchFamily="2" charset="-78"/>
                 <a:cs typeface="Amiri" pitchFamily="2" charset="-78"/>
               </a:rPr>
               <a:t>عَفْوًا، هَلْ يُمْكِنُ أَنْ تُعِيدَ السُّؤَالَ؟</a:t>
@@ -17005,6 +17130,7 @@
                   <a:srgbClr val="D4AF37"/>
                 </a:solidFill>
                 <a:latin typeface="Amiri" pitchFamily="2" charset="-78"/>
+                <a:ea typeface="Amiri" pitchFamily="2" charset="-78"/>
                 <a:cs typeface="Amiri" pitchFamily="2" charset="-78"/>
               </a:rPr>
               <a:t>م</a:t>
@@ -17325,6 +17451,7 @@
                   <a:srgbClr val="8A6D1E"/>
                 </a:solidFill>
                 <a:latin typeface="Amiri" pitchFamily="2" charset="-78"/>
+                <a:ea typeface="Amiri" pitchFamily="2" charset="-78"/>
                 <a:cs typeface="Amiri" pitchFamily="2" charset="-78"/>
               </a:rPr>
               <a:t>أَنَا وَعَالَمِي</a:t>
@@ -17605,6 +17732,7 @@
                   <a:srgbClr val="1B3B6F"/>
                 </a:solidFill>
                 <a:latin typeface="Amiri" pitchFamily="2" charset="-78"/>
+                <a:ea typeface="Amiri" pitchFamily="2" charset="-78"/>
                 <a:cs typeface="Amiri" pitchFamily="2" charset="-78"/>
               </a:rPr>
               <a:t>تَعَرَّفْتُ عَلَيْهِ عِنْدَمَا … هُوَ …</a:t>
@@ -17681,6 +17809,7 @@
                   <a:srgbClr val="1B3B6F"/>
                 </a:solidFill>
                 <a:latin typeface="Amiri" pitchFamily="2" charset="-78"/>
+                <a:ea typeface="Amiri" pitchFamily="2" charset="-78"/>
                 <a:cs typeface="Amiri" pitchFamily="2" charset="-78"/>
               </a:rPr>
               <a:t>كَيْفَ تَعَرَّفْتَ عَلَى صَدِيقِكَ المُفَضَّلِ؟ صِفْهُ.</a:t>
@@ -17784,6 +17913,7 @@
                   <a:srgbClr val="1B3B6F"/>
                 </a:solidFill>
                 <a:latin typeface="Amiri" pitchFamily="2" charset="-78"/>
+                <a:ea typeface="Amiri" pitchFamily="2" charset="-78"/>
                 <a:cs typeface="Amiri" pitchFamily="2" charset="-78"/>
               </a:rPr>
               <a:t>بَيْتُنَا … لٰكِنْ أُرِيدُ أَنْ …</a:t>
@@ -17860,6 +17990,7 @@
                   <a:srgbClr val="1B3B6F"/>
                 </a:solidFill>
                 <a:latin typeface="Amiri" pitchFamily="2" charset="-78"/>
+                <a:ea typeface="Amiri" pitchFamily="2" charset="-78"/>
                 <a:cs typeface="Amiri" pitchFamily="2" charset="-78"/>
               </a:rPr>
               <a:t>صِفْ بَيْتَكَ، وَمَا الَّذِي تُرِيدُ أَنْ تُغَيِّرَهُ؟</a:t>
@@ -17963,6 +18094,7 @@
                   <a:srgbClr val="1B3B6F"/>
                 </a:solidFill>
                 <a:latin typeface="Amiri" pitchFamily="2" charset="-78"/>
+                <a:ea typeface="Amiri" pitchFamily="2" charset="-78"/>
                 <a:cs typeface="Amiri" pitchFamily="2" charset="-78"/>
               </a:rPr>
               <a:t>… اشْتَرَيْتُ … وَكَانَ أَرْخَصَ …</a:t>
@@ -18039,6 +18171,7 @@
                   <a:srgbClr val="1B3B6F"/>
                 </a:solidFill>
                 <a:latin typeface="Amiri" pitchFamily="2" charset="-78"/>
+                <a:ea typeface="Amiri" pitchFamily="2" charset="-78"/>
                 <a:cs typeface="Amiri" pitchFamily="2" charset="-78"/>
               </a:rPr>
               <a:t>هَلْ تُحِبُّ التَّسَوُّقَ؟ صِفْ آخِرَ شَيْءٍ اشْتَرَيْتَهُ.</a:t>
@@ -18142,6 +18275,7 @@
                   <a:srgbClr val="1B3B6F"/>
                 </a:solidFill>
                 <a:latin typeface="Amiri" pitchFamily="2" charset="-78"/>
+                <a:ea typeface="Amiri" pitchFamily="2" charset="-78"/>
                 <a:cs typeface="Amiri" pitchFamily="2" charset="-78"/>
               </a:rPr>
               <a:t>أَقْضِي … لِأَنَّ … بِالإِضَافَةِ إِلَى ذٰلِكَ …</a:t>
@@ -18218,6 +18352,7 @@
                   <a:srgbClr val="1B3B6F"/>
                 </a:solidFill>
                 <a:latin typeface="Amiri" pitchFamily="2" charset="-78"/>
+                <a:ea typeface="Amiri" pitchFamily="2" charset="-78"/>
                 <a:cs typeface="Amiri" pitchFamily="2" charset="-78"/>
               </a:rPr>
               <a:t>كَيْفَ تَقْضِي وَقْتَ فَرَاغِكَ؟ وَلِمَاذَا؟</a:t>
@@ -18321,6 +18456,7 @@
                   <a:srgbClr val="1B3B6F"/>
                 </a:solidFill>
                 <a:latin typeface="Amiri" pitchFamily="2" charset="-78"/>
+                <a:ea typeface="Amiri" pitchFamily="2" charset="-78"/>
                 <a:cs typeface="Amiri" pitchFamily="2" charset="-78"/>
               </a:rPr>
               <a:t>حَضَرْتُ … أَوَّلًا … ثُمَّ …</a:t>
@@ -18397,6 +18533,7 @@
                   <a:srgbClr val="1B3B6F"/>
                 </a:solidFill>
                 <a:latin typeface="Amiri" pitchFamily="2" charset="-78"/>
+                <a:ea typeface="Amiri" pitchFamily="2" charset="-78"/>
                 <a:cs typeface="Amiri" pitchFamily="2" charset="-78"/>
               </a:rPr>
               <a:t>صِفْ مُنَاسَبَةً حَضَرْتَهَا مُؤَخَّرًا.</a:t>
@@ -18606,6 +18743,7 @@
                   <a:srgbClr val="D4AF37"/>
                 </a:solidFill>
                 <a:latin typeface="Amiri" pitchFamily="2" charset="-78"/>
+                <a:ea typeface="Amiri" pitchFamily="2" charset="-78"/>
                 <a:cs typeface="Amiri" pitchFamily="2" charset="-78"/>
               </a:rPr>
               <a:t>م</a:t>
@@ -18926,6 +19064,7 @@
                   <a:srgbClr val="8A6D1E"/>
                 </a:solidFill>
                 <a:latin typeface="Amiri" pitchFamily="2" charset="-78"/>
+                <a:ea typeface="Amiri" pitchFamily="2" charset="-78"/>
                 <a:cs typeface="Amiri" pitchFamily="2" charset="-78"/>
               </a:rPr>
               <a:t>الحَيَاةُ الشَّخْصِيَّةُ وَالمُجْتَمَعُ</a:t>
@@ -19206,6 +19345,7 @@
                   <a:srgbClr val="1B3B6F"/>
                 </a:solidFill>
                 <a:latin typeface="Amiri" pitchFamily="2" charset="-78"/>
+                <a:ea typeface="Amiri" pitchFamily="2" charset="-78"/>
                 <a:cs typeface="Amiri" pitchFamily="2" charset="-78"/>
               </a:rPr>
               <a:t>صَحِيحٌ أَنَّ … غَيْرَ أَنَّ …</a:t>
@@ -19282,6 +19422,7 @@
                   <a:srgbClr val="1B3B6F"/>
                 </a:solidFill>
                 <a:latin typeface="Amiri" pitchFamily="2" charset="-78"/>
+                <a:ea typeface="Amiri" pitchFamily="2" charset="-78"/>
                 <a:cs typeface="Amiri" pitchFamily="2" charset="-78"/>
               </a:rPr>
               <a:t>هَلْ تُحَدِّدُ المَلَابِسُ وَالمَظْهَرُ هُوِيَّتَنَا؟</a:t>
@@ -19385,6 +19526,7 @@
                   <a:srgbClr val="1B3B6F"/>
                 </a:solidFill>
                 <a:latin typeface="Amiri" pitchFamily="2" charset="-78"/>
+                <a:ea typeface="Amiri" pitchFamily="2" charset="-78"/>
                 <a:cs typeface="Amiri" pitchFamily="2" charset="-78"/>
               </a:rPr>
               <a:t>كُنَّا … أَمَّا الآنَ فَنَخْتَارُهُمْ …</a:t>
@@ -19461,6 +19603,7 @@
                   <a:srgbClr val="1B3B6F"/>
                 </a:solidFill>
                 <a:latin typeface="Amiri" pitchFamily="2" charset="-78"/>
+                <a:ea typeface="Amiri" pitchFamily="2" charset="-78"/>
                 <a:cs typeface="Amiri" pitchFamily="2" charset="-78"/>
               </a:rPr>
               <a:t>مَا الفَرْقُ بَيْنَ الصَّدَاقَةِ فِي الطُّفُولَةِ وَالصَّدَاقَةِ الآنَ؟</a:t>
@@ -19564,6 +19707,7 @@
                   <a:srgbClr val="1B3B6F"/>
                 </a:solidFill>
                 <a:latin typeface="Amiri" pitchFamily="2" charset="-78"/>
+                <a:ea typeface="Amiri" pitchFamily="2" charset="-78"/>
                 <a:cs typeface="Amiri" pitchFamily="2" charset="-78"/>
               </a:rPr>
               <a:t>لَا أَظُنُّ ذٰلِكَ، لِأَنَّ … فَمَثَلًا …</a:t>
@@ -19640,6 +19784,7 @@
                   <a:srgbClr val="1B3B6F"/>
                 </a:solidFill>
                 <a:latin typeface="Amiri" pitchFamily="2" charset="-78"/>
+                <a:ea typeface="Amiri" pitchFamily="2" charset="-78"/>
                 <a:cs typeface="Amiri" pitchFamily="2" charset="-78"/>
               </a:rPr>
               <a:t>هَلِ البَيْتُ الكَبِيرُ يَجْعَلُ الأُسْرَةَ أَسْعَدَ؟</a:t>
@@ -19743,6 +19888,7 @@
                   <a:srgbClr val="1B3B6F"/>
                 </a:solidFill>
                 <a:latin typeface="Amiri" pitchFamily="2" charset="-78"/>
+                <a:ea typeface="Amiri" pitchFamily="2" charset="-78"/>
                 <a:cs typeface="Amiri" pitchFamily="2" charset="-78"/>
               </a:rPr>
               <a:t>عِنْدَمَا بَدَأْتُ … تَغَيَّرَ … فَأَصْبَحْتُ …</a:t>
@@ -19819,6 +19965,7 @@
                   <a:srgbClr val="1B3B6F"/>
                 </a:solidFill>
                 <a:latin typeface="Amiri" pitchFamily="2" charset="-78"/>
+                <a:ea typeface="Amiri" pitchFamily="2" charset="-78"/>
                 <a:cs typeface="Amiri" pitchFamily="2" charset="-78"/>
               </a:rPr>
               <a:t>صِفْ هِوَايَةً غَيَّرَتْ حَيَاتَكَ.</a:t>
@@ -19922,6 +20069,7 @@
                   <a:srgbClr val="1B3B6F"/>
                 </a:solidFill>
                 <a:latin typeface="Amiri" pitchFamily="2" charset="-78"/>
+                <a:ea typeface="Amiri" pitchFamily="2" charset="-78"/>
                 <a:cs typeface="Amiri" pitchFamily="2" charset="-78"/>
               </a:rPr>
               <a:t>لَوْ نَظَّمْتُ …، لَجَمَعْتُ … وَلَطَلَبْتُ …</a:t>
@@ -19998,6 +20146,7 @@
                   <a:srgbClr val="1B3B6F"/>
                 </a:solidFill>
                 <a:latin typeface="Amiri" pitchFamily="2" charset="-78"/>
+                <a:ea typeface="Amiri" pitchFamily="2" charset="-78"/>
                 <a:cs typeface="Amiri" pitchFamily="2" charset="-78"/>
               </a:rPr>
               <a:t>لَوْ نَظَّمْتَ احْتِفَالًا لِعَائِلَتِكَ الكَبِيرَةِ، كَيْفَ يَكُونُ؟</a:t>
@@ -20207,6 +20356,7 @@
                   <a:srgbClr val="D4AF37"/>
                 </a:solidFill>
                 <a:latin typeface="Amiri" pitchFamily="2" charset="-78"/>
+                <a:ea typeface="Amiri" pitchFamily="2" charset="-78"/>
                 <a:cs typeface="Amiri" pitchFamily="2" charset="-78"/>
               </a:rPr>
               <a:t>م</a:t>
@@ -20527,6 +20677,7 @@
                   <a:srgbClr val="8A6D1E"/>
                 </a:solidFill>
                 <a:latin typeface="Amiri" pitchFamily="2" charset="-78"/>
+                <a:ea typeface="Amiri" pitchFamily="2" charset="-78"/>
                 <a:cs typeface="Amiri" pitchFamily="2" charset="-78"/>
               </a:rPr>
               <a:t>آدَابُ الصَّفِّ</a:t>
@@ -22058,6 +22209,7 @@
                   <a:srgbClr val="D4AF37"/>
                 </a:solidFill>
                 <a:latin typeface="Amiri" pitchFamily="2" charset="-78"/>
+                <a:ea typeface="Amiri" pitchFamily="2" charset="-78"/>
                 <a:cs typeface="Amiri" pitchFamily="2" charset="-78"/>
               </a:rPr>
               <a:t>م</a:t>
@@ -22378,6 +22530,7 @@
                   <a:srgbClr val="8A6D1E"/>
                 </a:solidFill>
                 <a:latin typeface="Amiri" pitchFamily="2" charset="-78"/>
+                <a:ea typeface="Amiri" pitchFamily="2" charset="-78"/>
                 <a:cs typeface="Amiri" pitchFamily="2" charset="-78"/>
               </a:rPr>
               <a:t>نَمُوذَجُ الإِجَابَةِ</a:t>
@@ -22620,6 +22773,7 @@
                   <a:srgbClr val="1B3B6F"/>
                 </a:solidFill>
                 <a:latin typeface="Amiri" pitchFamily="2" charset="-78"/>
+                <a:ea typeface="Amiri" pitchFamily="2" charset="-78"/>
                 <a:cs typeface="Amiri" pitchFamily="2" charset="-78"/>
               </a:rPr>
               <a:t>اسْمِي آدَمُ، وَعُمْرِي خَمْسَ عَشْرَةَ سَنَةً، وَأَنَا بِرِيطَانِيٌّ.</a:t>
@@ -22696,6 +22850,7 @@
                   <a:srgbClr val="1B3B6F"/>
                 </a:solidFill>
                 <a:latin typeface="Amiri" pitchFamily="2" charset="-78"/>
+                <a:ea typeface="Amiri" pitchFamily="2" charset="-78"/>
                 <a:cs typeface="Amiri" pitchFamily="2" charset="-78"/>
               </a:rPr>
               <a:t>عَرِّفْنَا بِنَفْسِكَ.</a:t>
@@ -22799,6 +22954,7 @@
                   <a:srgbClr val="1B3B6F"/>
                 </a:solidFill>
                 <a:latin typeface="Amiri" pitchFamily="2" charset="-78"/>
+                <a:ea typeface="Amiri" pitchFamily="2" charset="-78"/>
                 <a:cs typeface="Amiri" pitchFamily="2" charset="-78"/>
               </a:rPr>
               <a:t>أُخْتِي قَصِيرَةٌ، وَشَعْرُهَا بُنِّيٌّ، وَهِيَ ذَكِيَّةٌ جِدًّا.</a:t>
@@ -22875,6 +23031,7 @@
                   <a:srgbClr val="1B3B6F"/>
                 </a:solidFill>
                 <a:latin typeface="Amiri" pitchFamily="2" charset="-78"/>
+                <a:ea typeface="Amiri" pitchFamily="2" charset="-78"/>
                 <a:cs typeface="Amiri" pitchFamily="2" charset="-78"/>
               </a:rPr>
               <a:t>صِفْ أَحَدَ أَفْرَادِ أُسْرَتِكَ.</a:t>
@@ -22978,6 +23135,7 @@
                   <a:srgbClr val="1B3B6F"/>
                 </a:solidFill>
                 <a:latin typeface="Amiri" pitchFamily="2" charset="-78"/>
+                <a:ea typeface="Amiri" pitchFamily="2" charset="-78"/>
                 <a:cs typeface="Amiri" pitchFamily="2" charset="-78"/>
               </a:rPr>
               <a:t>يُوجَدُ سَرِيرٌ وَمَكْتَبٌ، وَتُوجَدُ خِزَانَةٌ بَيْضَاءُ.</a:t>
@@ -23054,6 +23212,7 @@
                   <a:srgbClr val="1B3B6F"/>
                 </a:solidFill>
                 <a:latin typeface="Amiri" pitchFamily="2" charset="-78"/>
+                <a:ea typeface="Amiri" pitchFamily="2" charset="-78"/>
                 <a:cs typeface="Amiri" pitchFamily="2" charset="-78"/>
               </a:rPr>
               <a:t>مَاذَا يُوجَدُ فِي غُرْفَتِكَ؟</a:t>
@@ -23157,6 +23316,7 @@
                   <a:srgbClr val="1B3B6F"/>
                 </a:solidFill>
                 <a:latin typeface="Amiri" pitchFamily="2" charset="-78"/>
+                <a:ea typeface="Amiri" pitchFamily="2" charset="-78"/>
                 <a:cs typeface="Amiri" pitchFamily="2" charset="-78"/>
               </a:rPr>
               <a:t>أُحِبُّ سُتْرَتِيَ الزَّرْقَاءَ، لِأَنَّهَا مُرِيحَةٌ.</a:t>
@@ -23233,6 +23393,7 @@
                   <a:srgbClr val="1B3B6F"/>
                 </a:solidFill>
                 <a:latin typeface="Amiri" pitchFamily="2" charset="-78"/>
+                <a:ea typeface="Amiri" pitchFamily="2" charset="-78"/>
                 <a:cs typeface="Amiri" pitchFamily="2" charset="-78"/>
               </a:rPr>
               <a:t>مَا مَلَابِسُكَ المُفَضَّلَةُ؟</a:t>
@@ -23336,6 +23497,7 @@
                   <a:srgbClr val="1B3B6F"/>
                 </a:solidFill>
                 <a:latin typeface="Amiri" pitchFamily="2" charset="-78"/>
+                <a:ea typeface="Amiri" pitchFamily="2" charset="-78"/>
                 <a:cs typeface="Amiri" pitchFamily="2" charset="-78"/>
               </a:rPr>
               <a:t>أَلْعَبُ كُرَةَ القَدَمِ، وَأَزُورُ جَدِّي يَوْمَ الأَحَدِ.</a:t>
@@ -23412,6 +23574,7 @@
                   <a:srgbClr val="1B3B6F"/>
                 </a:solidFill>
                 <a:latin typeface="Amiri" pitchFamily="2" charset="-78"/>
+                <a:ea typeface="Amiri" pitchFamily="2" charset="-78"/>
                 <a:cs typeface="Amiri" pitchFamily="2" charset="-78"/>
               </a:rPr>
               <a:t>مَاذَا تَفْعَلُ فِي نِهَايَةِ الأُسْبُوعِ؟</a:t>
@@ -23621,6 +23784,7 @@
                   <a:srgbClr val="D4AF37"/>
                 </a:solidFill>
                 <a:latin typeface="Amiri" pitchFamily="2" charset="-78"/>
+                <a:ea typeface="Amiri" pitchFamily="2" charset="-78"/>
                 <a:cs typeface="Amiri" pitchFamily="2" charset="-78"/>
               </a:rPr>
               <a:t>م</a:t>
@@ -23941,6 +24105,7 @@
                   <a:srgbClr val="8A6D1E"/>
                 </a:solidFill>
                 <a:latin typeface="Amiri" pitchFamily="2" charset="-78"/>
+                <a:ea typeface="Amiri" pitchFamily="2" charset="-78"/>
                 <a:cs typeface="Amiri" pitchFamily="2" charset="-78"/>
               </a:rPr>
               <a:t>نَمُوذَجُ الإِجَابَةِ</a:t>
@@ -24183,6 +24348,7 @@
                   <a:srgbClr val="1B3B6F"/>
                 </a:solidFill>
                 <a:latin typeface="Amiri" pitchFamily="2" charset="-78"/>
+                <a:ea typeface="Amiri" pitchFamily="2" charset="-78"/>
                 <a:cs typeface="Amiri" pitchFamily="2" charset="-78"/>
               </a:rPr>
               <a:t>تَعَرَّفْتُ عَلَيْهِ عِنْدَمَا انْضَمَمْنَا إِلَى فَرِيقِ كُرَةِ القَدَمِ، وَهُوَ طَوِيلٌ وَمَرِحٌ وَكَرِيمٌ جِدًّا.</a:t>
@@ -24259,6 +24425,7 @@
                   <a:srgbClr val="1B3B6F"/>
                 </a:solidFill>
                 <a:latin typeface="Amiri" pitchFamily="2" charset="-78"/>
+                <a:ea typeface="Amiri" pitchFamily="2" charset="-78"/>
                 <a:cs typeface="Amiri" pitchFamily="2" charset="-78"/>
               </a:rPr>
               <a:t>كَيْفَ تَعَرَّفْتَ عَلَى صَدِيقِكَ المُفَضَّلِ؟ صِفْهُ.</a:t>
@@ -24362,6 +24529,7 @@
                   <a:srgbClr val="1B3B6F"/>
                 </a:solidFill>
                 <a:latin typeface="Amiri" pitchFamily="2" charset="-78"/>
+                <a:ea typeface="Amiri" pitchFamily="2" charset="-78"/>
                 <a:cs typeface="Amiri" pitchFamily="2" charset="-78"/>
               </a:rPr>
               <a:t>بَيْتُنَا مُرِيحٌ وَفِيهِ حَدِيقَةٌ صَغِيرَةٌ، لٰكِنْ أُرِيدُ أَنْ أُغَيِّرَ لَوْنَ غُرْفَتِي، لِأَنَّهُ مُمِلٌّ.</a:t>
@@ -24438,6 +24606,7 @@
                   <a:srgbClr val="1B3B6F"/>
                 </a:solidFill>
                 <a:latin typeface="Amiri" pitchFamily="2" charset="-78"/>
+                <a:ea typeface="Amiri" pitchFamily="2" charset="-78"/>
                 <a:cs typeface="Amiri" pitchFamily="2" charset="-78"/>
               </a:rPr>
               <a:t>صِفْ بَيْتَكَ، وَمَا الَّذِي تُرِيدُ أَنْ تُغَيِّرَهُ؟</a:t>
@@ -24541,6 +24710,7 @@
                   <a:srgbClr val="1B3B6F"/>
                 </a:solidFill>
                 <a:latin typeface="Amiri" pitchFamily="2" charset="-78"/>
+                <a:ea typeface="Amiri" pitchFamily="2" charset="-78"/>
                 <a:cs typeface="Amiri" pitchFamily="2" charset="-78"/>
               </a:rPr>
               <a:t>لَا كَثِيرًا، لٰكِنِّي اشْتَرَيْتُ حِذَاءً رِيَاضِيًّا أَبْيَضَ فِي التَّخْفِيضَاتِ، وَكَانَ أَرْخَصَ بِعِشْرِينَ جُنَيْهًا.</a:t>
@@ -24617,6 +24787,7 @@
                   <a:srgbClr val="1B3B6F"/>
                 </a:solidFill>
                 <a:latin typeface="Amiri" pitchFamily="2" charset="-78"/>
+                <a:ea typeface="Amiri" pitchFamily="2" charset="-78"/>
                 <a:cs typeface="Amiri" pitchFamily="2" charset="-78"/>
               </a:rPr>
               <a:t>هَلْ تُحِبُّ التَّسَوُّقَ؟ صِفْ آخِرَ شَيْءٍ اشْتَرَيْتَهُ.</a:t>
@@ -24720,6 +24891,7 @@
                   <a:srgbClr val="1B3B6F"/>
                 </a:solidFill>
                 <a:latin typeface="Amiri" pitchFamily="2" charset="-78"/>
+                <a:ea typeface="Amiri" pitchFamily="2" charset="-78"/>
                 <a:cs typeface="Amiri" pitchFamily="2" charset="-78"/>
               </a:rPr>
               <a:t>أَقْضِيهِ فِي الرَّسْمِ لِأَنَّهُ يُرِيحُنِي، وَبِالإِضَافَةِ إِلَى ذٰلِكَ أَسْبَحُ مَرَّتَيْنِ فِي الأُسْبُوعِ.</a:t>
@@ -24796,6 +24968,7 @@
                   <a:srgbClr val="1B3B6F"/>
                 </a:solidFill>
                 <a:latin typeface="Amiri" pitchFamily="2" charset="-78"/>
+                <a:ea typeface="Amiri" pitchFamily="2" charset="-78"/>
                 <a:cs typeface="Amiri" pitchFamily="2" charset="-78"/>
               </a:rPr>
               <a:t>كَيْفَ تَقْضِي وَقْتَ فَرَاغِكَ؟ وَلِمَاذَا؟</a:t>
@@ -24899,6 +25072,7 @@
                   <a:srgbClr val="1B3B6F"/>
                 </a:solidFill>
                 <a:latin typeface="Amiri" pitchFamily="2" charset="-78"/>
+                <a:ea typeface="Amiri" pitchFamily="2" charset="-78"/>
                 <a:cs typeface="Amiri" pitchFamily="2" charset="-78"/>
               </a:rPr>
               <a:t>حَضَرْتُ زِفَافَ ابْنِ خَالِي؛ أَوَّلًا رَقَصْنَا الدَّبْكَةَ، ثُمَّ تَعَشَّيْنَا، وَأَخِيرًا أَخَذْنَا صُوَرًا مَعَ العَرُوسَيْنِ.</a:t>
@@ -24975,6 +25149,7 @@
                   <a:srgbClr val="1B3B6F"/>
                 </a:solidFill>
                 <a:latin typeface="Amiri" pitchFamily="2" charset="-78"/>
+                <a:ea typeface="Amiri" pitchFamily="2" charset="-78"/>
                 <a:cs typeface="Amiri" pitchFamily="2" charset="-78"/>
               </a:rPr>
               <a:t>صِفْ مُنَاسَبَةً حَضَرْتَهَا مُؤَخَّرًا.</a:t>
@@ -25184,6 +25359,7 @@
                   <a:srgbClr val="D4AF37"/>
                 </a:solidFill>
                 <a:latin typeface="Amiri" pitchFamily="2" charset="-78"/>
+                <a:ea typeface="Amiri" pitchFamily="2" charset="-78"/>
                 <a:cs typeface="Amiri" pitchFamily="2" charset="-78"/>
               </a:rPr>
               <a:t>م</a:t>
@@ -25504,6 +25680,7 @@
                   <a:srgbClr val="8A6D1E"/>
                 </a:solidFill>
                 <a:latin typeface="Amiri" pitchFamily="2" charset="-78"/>
+                <a:ea typeface="Amiri" pitchFamily="2" charset="-78"/>
                 <a:cs typeface="Amiri" pitchFamily="2" charset="-78"/>
               </a:rPr>
               <a:t>نَمُوذَجُ الإِجَابَةِ</a:t>
@@ -25746,6 +25923,7 @@
                   <a:srgbClr val="1B3B6F"/>
                 </a:solidFill>
                 <a:latin typeface="Amiri" pitchFamily="2" charset="-78"/>
+                <a:ea typeface="Amiri" pitchFamily="2" charset="-78"/>
                 <a:cs typeface="Amiri" pitchFamily="2" charset="-78"/>
               </a:rPr>
               <a:t>صَحِيحٌ أَنَّ المَلَابِسَ تُعَبِّرُ عَنْ ذَوْقِنَا، غَيْرَ أَنَّ هُوِيَّتَنَا الحَقِيقِيَّةَ فِي قِيَمِنَا وَطَرِيقَةِ تَعَامُلِنَا مَعَ النَّاسِ.</a:t>
@@ -25822,6 +26000,7 @@
                   <a:srgbClr val="1B3B6F"/>
                 </a:solidFill>
                 <a:latin typeface="Amiri" pitchFamily="2" charset="-78"/>
+                <a:ea typeface="Amiri" pitchFamily="2" charset="-78"/>
                 <a:cs typeface="Amiri" pitchFamily="2" charset="-78"/>
               </a:rPr>
               <a:t>هَلْ تُحَدِّدُ المَلَابِسُ وَالمَظْهَرُ هُوِيَّتَنَا؟</a:t>
@@ -25925,6 +26104,7 @@
                   <a:srgbClr val="1B3B6F"/>
                 </a:solidFill>
                 <a:latin typeface="Amiri" pitchFamily="2" charset="-78"/>
+                <a:ea typeface="Amiri" pitchFamily="2" charset="-78"/>
                 <a:cs typeface="Amiri" pitchFamily="2" charset="-78"/>
               </a:rPr>
               <a:t>كُنَّا نَخْتَارُ أَصْدِقَاءَنَا لِأَنَّهُمْ يَلْعَبُونَ مَعَنَا، أَمَّا الآنَ فَنَخْتَارُهُمْ لِأَنَّهُمْ يَفْهَمُونَنَا وَيُشَارِكُونَنَا القِيَمَ نَفْسَهَا.</a:t>
@@ -26004,6 +26184,7 @@
                   <a:srgbClr val="1B3B6F"/>
                 </a:solidFill>
                 <a:latin typeface="Amiri" pitchFamily="2" charset="-78"/>
+                <a:ea typeface="Amiri" pitchFamily="2" charset="-78"/>
                 <a:cs typeface="Amiri" pitchFamily="2" charset="-78"/>
               </a:rPr>
               <a:t>مَا الفَرْقُ بَيْنَ الصَّدَاقَةِ فِي الطُّفُولَةِ وَالصَّدَاقَةِ الآنَ؟</a:t>
@@ -26107,6 +26288,7 @@
                   <a:srgbClr val="1B3B6F"/>
                 </a:solidFill>
                 <a:latin typeface="Amiri" pitchFamily="2" charset="-78"/>
+                <a:ea typeface="Amiri" pitchFamily="2" charset="-78"/>
                 <a:cs typeface="Amiri" pitchFamily="2" charset="-78"/>
               </a:rPr>
               <a:t>لَا أَظُنُّ ذٰلِكَ، لِأَنَّ السَّعَادَةَ فِي العَلَاقَاتِ لَا فِي الغُرَفِ؛ فَمَثَلًا بَيْتُ جَدَّتِي صَغِيرٌ، لٰكِنَّهُ أَدْفَأُ مَكَانٍ أَعْرِفُهُ.</a:t>
@@ -26183,6 +26365,7 @@
                   <a:srgbClr val="1B3B6F"/>
                 </a:solidFill>
                 <a:latin typeface="Amiri" pitchFamily="2" charset="-78"/>
+                <a:ea typeface="Amiri" pitchFamily="2" charset="-78"/>
                 <a:cs typeface="Amiri" pitchFamily="2" charset="-78"/>
               </a:rPr>
               <a:t>هَلِ البَيْتُ الكَبِيرُ يَجْعَلُ الأُسْرَةَ أَسْعَدَ؟</a:t>
@@ -26392,6 +26575,7 @@
                   <a:srgbClr val="D4AF37"/>
                 </a:solidFill>
                 <a:latin typeface="Amiri" pitchFamily="2" charset="-78"/>
+                <a:ea typeface="Amiri" pitchFamily="2" charset="-78"/>
                 <a:cs typeface="Amiri" pitchFamily="2" charset="-78"/>
               </a:rPr>
               <a:t>م</a:t>
@@ -26712,6 +26896,7 @@
                   <a:srgbClr val="8A6D1E"/>
                 </a:solidFill>
                 <a:latin typeface="Amiri" pitchFamily="2" charset="-78"/>
+                <a:ea typeface="Amiri" pitchFamily="2" charset="-78"/>
                 <a:cs typeface="Amiri" pitchFamily="2" charset="-78"/>
               </a:rPr>
               <a:t>نَمُوذَجُ الإِجَابَةِ</a:t>
@@ -26954,6 +27139,7 @@
                   <a:srgbClr val="1B3B6F"/>
                 </a:solidFill>
                 <a:latin typeface="Amiri" pitchFamily="2" charset="-78"/>
+                <a:ea typeface="Amiri" pitchFamily="2" charset="-78"/>
                 <a:cs typeface="Amiri" pitchFamily="2" charset="-78"/>
               </a:rPr>
               <a:t>عِنْدَمَا بَدَأْتُ تَعَلُّمَ العُودِ، تَغَيَّرَ رُوتِينِي كُلُّهُ، فَأَصْبَحْتُ أَنَامُ مُبَكِّرًا لِأَتَدَرَّبَ قَبْلَ المَدْرَسَةِ.</a:t>
@@ -27030,6 +27216,7 @@
                   <a:srgbClr val="1B3B6F"/>
                 </a:solidFill>
                 <a:latin typeface="Amiri" pitchFamily="2" charset="-78"/>
+                <a:ea typeface="Amiri" pitchFamily="2" charset="-78"/>
                 <a:cs typeface="Amiri" pitchFamily="2" charset="-78"/>
               </a:rPr>
               <a:t>صِفْ هِوَايَةً غَيَّرَتْ حَيَاتَكَ.</a:t>
@@ -27133,6 +27320,7 @@
                   <a:srgbClr val="1B3B6F"/>
                 </a:solidFill>
                 <a:latin typeface="Amiri" pitchFamily="2" charset="-78"/>
+                <a:ea typeface="Amiri" pitchFamily="2" charset="-78"/>
                 <a:cs typeface="Amiri" pitchFamily="2" charset="-78"/>
               </a:rPr>
               <a:t>لَوْ نَظَّمْتُ احْتِفَالًا، لَجَمَعْتُ الأَقَارِبَ مِنْ كُلِّ البُلْدَانِ فِي قَرْيَةِ أَجْدَادِي، وَلَطَلَبْتُ مِنْ كُلِّ جِيلٍ أَنْ يَحْكِيَ قِصَّةً.</a:t>
@@ -27212,6 +27400,7 @@
                   <a:srgbClr val="1B3B6F"/>
                 </a:solidFill>
                 <a:latin typeface="Amiri" pitchFamily="2" charset="-78"/>
+                <a:ea typeface="Amiri" pitchFamily="2" charset="-78"/>
                 <a:cs typeface="Amiri" pitchFamily="2" charset="-78"/>
               </a:rPr>
               <a:t>لَوْ نَظَّمْتَ احْتِفَالًا لِعَائِلَتِكَ الكَبِيرَةِ، كَيْفَ يَكُونُ؟</a:t>
@@ -27421,6 +27610,7 @@
                   <a:srgbClr val="D4AF37"/>
                 </a:solidFill>
                 <a:latin typeface="Amiri" pitchFamily="2" charset="-78"/>
+                <a:ea typeface="Amiri" pitchFamily="2" charset="-78"/>
                 <a:cs typeface="Amiri" pitchFamily="2" charset="-78"/>
               </a:rPr>
               <a:t>م</a:t>
@@ -27741,6 +27931,7 @@
                   <a:srgbClr val="8A6D1E"/>
                 </a:solidFill>
                 <a:latin typeface="Amiri" pitchFamily="2" charset="-78"/>
+                <a:ea typeface="Amiri" pitchFamily="2" charset="-78"/>
                 <a:cs typeface="Amiri" pitchFamily="2" charset="-78"/>
               </a:rPr>
               <a:t>قَيِّمْ عَمَلَكَ</a:t>
@@ -28985,6 +29176,7 @@
                   <a:srgbClr val="FFFFFF"/>
                 </a:solidFill>
                 <a:latin typeface="Amiri" pitchFamily="2" charset="-78"/>
+                <a:ea typeface="Amiri" pitchFamily="2" charset="-78"/>
                 <a:cs typeface="Amiri" pitchFamily="2" charset="-78"/>
               </a:rPr>
               <a:t>أَحْسَنْتُمْ! إِلَى اللِّقَاءِ</a:t>
@@ -29137,6 +29329,7 @@
                   <a:srgbClr val="D4AF37"/>
                 </a:solidFill>
                 <a:latin typeface="Amiri" pitchFamily="2" charset="-78"/>
+                <a:ea typeface="Amiri" pitchFamily="2" charset="-78"/>
                 <a:cs typeface="Amiri" pitchFamily="2" charset="-78"/>
               </a:rPr>
               <a:t>وَرْشَةُ الكِتَابَةِ</a:t>
@@ -29270,6 +29463,7 @@
                   <a:srgbClr val="D4AF37"/>
                 </a:solidFill>
                 <a:latin typeface="Amiri" pitchFamily="2" charset="-78"/>
+                <a:ea typeface="Amiri" pitchFamily="2" charset="-78"/>
                 <a:cs typeface="Amiri" pitchFamily="2" charset="-78"/>
               </a:rPr>
               <a:t>م</a:t>
@@ -29590,6 +29784,7 @@
                   <a:srgbClr val="8A6D1E"/>
                 </a:solidFill>
                 <a:latin typeface="Amiri" pitchFamily="2" charset="-78"/>
+                <a:ea typeface="Amiri" pitchFamily="2" charset="-78"/>
                 <a:cs typeface="Amiri" pitchFamily="2" charset="-78"/>
               </a:rPr>
               <a:t>خَرِيطَةُ الوَرْشَةِ</a:t>
@@ -29904,6 +30099,7 @@
                   <a:srgbClr val="1B3B6F"/>
                 </a:solidFill>
                 <a:latin typeface="Amiri" pitchFamily="2" charset="-78"/>
+                <a:ea typeface="Amiri" pitchFamily="2" charset="-78"/>
                 <a:cs typeface="Amiri" pitchFamily="2" charset="-78"/>
               </a:rPr>
               <a:t>كَيْفَ</a:t>
@@ -30180,6 +30376,7 @@
                   <a:srgbClr val="1E6B52"/>
                 </a:solidFill>
                 <a:latin typeface="Amiri" pitchFamily="2" charset="-78"/>
+                <a:ea typeface="Amiri" pitchFamily="2" charset="-78"/>
                 <a:cs typeface="Amiri" pitchFamily="2" charset="-78"/>
               </a:rPr>
               <a:t>تَمْثِيلُ الدَّوْرِ</a:t>
@@ -30456,6 +30653,7 @@
                   <a:srgbClr val="8A6D1E"/>
                 </a:solidFill>
                 <a:latin typeface="Amiri" pitchFamily="2" charset="-78"/>
+                <a:ea typeface="Amiri" pitchFamily="2" charset="-78"/>
                 <a:cs typeface="Amiri" pitchFamily="2" charset="-78"/>
               </a:rPr>
               <a:t>النَّمُوذَجُ</a:t>
@@ -30732,6 +30930,7 @@
                   <a:srgbClr val="1E6B52"/>
                 </a:solidFill>
                 <a:latin typeface="Amiri" pitchFamily="2" charset="-78"/>
+                <a:ea typeface="Amiri" pitchFamily="2" charset="-78"/>
                 <a:cs typeface="Amiri" pitchFamily="2" charset="-78"/>
               </a:rPr>
               <a:t>المُحَادَثَةُ</a:t>
@@ -31008,6 +31207,7 @@
                   <a:srgbClr val="8A6D1E"/>
                 </a:solidFill>
                 <a:latin typeface="Amiri" pitchFamily="2" charset="-78"/>
+                <a:ea typeface="Amiri" pitchFamily="2" charset="-78"/>
                 <a:cs typeface="Amiri" pitchFamily="2" charset="-78"/>
               </a:rPr>
               <a:t>قَيِّمْ</a:t>
@@ -31251,6 +31451,7 @@
                   <a:srgbClr val="D4AF37"/>
                 </a:solidFill>
                 <a:latin typeface="Amiri" pitchFamily="2" charset="-78"/>
+                <a:ea typeface="Amiri" pitchFamily="2" charset="-78"/>
                 <a:cs typeface="Amiri" pitchFamily="2" charset="-78"/>
               </a:rPr>
               <a:t>م</a:t>
@@ -31571,6 +31772,7 @@
                   <a:srgbClr val="8A6D1E"/>
                 </a:solidFill>
                 <a:latin typeface="Amiri" pitchFamily="2" charset="-78"/>
+                <a:ea typeface="Amiri" pitchFamily="2" charset="-78"/>
                 <a:cs typeface="Amiri" pitchFamily="2" charset="-78"/>
               </a:rPr>
               <a:t>امْتِحَانُ التَّحَدُّثِ</a:t>
@@ -32195,6 +32397,7 @@
                   <a:srgbClr val="1B3B6F"/>
                 </a:solidFill>
                 <a:latin typeface="Amiri" pitchFamily="2" charset="-78"/>
+                <a:ea typeface="Amiri" pitchFamily="2" charset="-78"/>
                 <a:cs typeface="Amiri" pitchFamily="2" charset="-78"/>
               </a:rPr>
               <a:t>عَفْوًا، هَلْ يُمْكِنُ أَنْ تُعِيدَ السُّؤَالَ؟</a:t>
@@ -32294,6 +32497,7 @@
                   <a:srgbClr val="1B3B6F"/>
                 </a:solidFill>
                 <a:latin typeface="Amiri" pitchFamily="2" charset="-78"/>
+                <a:ea typeface="Amiri" pitchFamily="2" charset="-78"/>
                 <a:cs typeface="Amiri" pitchFamily="2" charset="-78"/>
               </a:rPr>
               <a:t>لَحْظَةً، دَعْنِي أُفَكِّرُ …</a:t>
@@ -32393,6 +32597,7 @@
                   <a:srgbClr val="1B3B6F"/>
                 </a:solidFill>
                 <a:latin typeface="Amiri" pitchFamily="2" charset="-78"/>
+                <a:ea typeface="Amiri" pitchFamily="2" charset="-78"/>
                 <a:cs typeface="Amiri" pitchFamily="2" charset="-78"/>
               </a:rPr>
               <a:t>أَقْصِدُ …</a:t>
@@ -32564,6 +32769,7 @@
                   <a:srgbClr val="D4AF37"/>
                 </a:solidFill>
                 <a:latin typeface="Amiri" pitchFamily="2" charset="-78"/>
+                <a:ea typeface="Amiri" pitchFamily="2" charset="-78"/>
                 <a:cs typeface="Amiri" pitchFamily="2" charset="-78"/>
               </a:rPr>
               <a:t>م</a:t>
@@ -32884,6 +33090,7 @@
                   <a:srgbClr val="8A6D1E"/>
                 </a:solidFill>
                 <a:latin typeface="Amiri" pitchFamily="2" charset="-78"/>
+                <a:ea typeface="Amiri" pitchFamily="2" charset="-78"/>
                 <a:cs typeface="Amiri" pitchFamily="2" charset="-78"/>
               </a:rPr>
               <a:t>المِحْوَرُ ب فِي اثْنَتَيْ عَشْرَةَ بِنْيَةً</a:t>
@@ -33187,6 +33394,7 @@
                   <a:srgbClr val="1B3B6F"/>
                 </a:solidFill>
                 <a:latin typeface="Amiri" pitchFamily="2" charset="-78"/>
+                <a:ea typeface="Amiri" pitchFamily="2" charset="-78"/>
                 <a:cs typeface="Amiri" pitchFamily="2" charset="-78"/>
               </a:rPr>
               <a:t>أَنَا بِرِيطَانِيٌّ وَأَصْلِي مِنْ مِصْرَ</a:t>
@@ -33344,6 +33552,7 @@
                   <a:srgbClr val="1B3B6F"/>
                 </a:solidFill>
                 <a:latin typeface="Amiri" pitchFamily="2" charset="-78"/>
+                <a:ea typeface="Amiri" pitchFamily="2" charset="-78"/>
                 <a:cs typeface="Amiri" pitchFamily="2" charset="-78"/>
               </a:rPr>
               <a:t>أَنَا بِرِيطَانِيَّةٌ</a:t>
@@ -33609,6 +33818,7 @@
                   <a:srgbClr val="1B3B6F"/>
                 </a:solidFill>
                 <a:latin typeface="Amiri" pitchFamily="2" charset="-78"/>
+                <a:ea typeface="Amiri" pitchFamily="2" charset="-78"/>
                 <a:cs typeface="Amiri" pitchFamily="2" charset="-78"/>
               </a:rPr>
               <a:t>عِنْدِي أُخْتَانِ</a:t>
@@ -33766,6 +33976,7 @@
                   <a:srgbClr val="1B3B6F"/>
                 </a:solidFill>
                 <a:latin typeface="Amiri" pitchFamily="2" charset="-78"/>
+                <a:ea typeface="Amiri" pitchFamily="2" charset="-78"/>
                 <a:cs typeface="Amiri" pitchFamily="2" charset="-78"/>
               </a:rPr>
               <a:t>ابْنُ عَمِّي</a:t>
@@ -33869,6 +34080,7 @@
                   <a:srgbClr val="1B3B6F"/>
                 </a:solidFill>
                 <a:latin typeface="Amiri" pitchFamily="2" charset="-78"/>
+                <a:ea typeface="Amiri" pitchFamily="2" charset="-78"/>
                 <a:cs typeface="Amiri" pitchFamily="2" charset="-78"/>
               </a:rPr>
               <a:t>أَخَوَانِ</a:t>
@@ -34134,6 +34346,7 @@
                   <a:srgbClr val="1B3B6F"/>
                 </a:solidFill>
                 <a:latin typeface="Amiri" pitchFamily="2" charset="-78"/>
+                <a:ea typeface="Amiri" pitchFamily="2" charset="-78"/>
                 <a:cs typeface="Amiri" pitchFamily="2" charset="-78"/>
               </a:rPr>
               <a:t>لَيْسَ صَارِمًا، بَلْ لَطِيفٌ</a:t>
@@ -34291,6 +34504,7 @@
                   <a:srgbClr val="1B3B6F"/>
                 </a:solidFill>
                 <a:latin typeface="Amiri" pitchFamily="2" charset="-78"/>
+                <a:ea typeface="Amiri" pitchFamily="2" charset="-78"/>
                 <a:cs typeface="Amiri" pitchFamily="2" charset="-78"/>
               </a:rPr>
               <a:t>لَسْتُ</a:t>
@@ -34394,6 +34608,7 @@
                   <a:srgbClr val="1B3B6F"/>
                 </a:solidFill>
                 <a:latin typeface="Amiri" pitchFamily="2" charset="-78"/>
+                <a:ea typeface="Amiri" pitchFamily="2" charset="-78"/>
                 <a:cs typeface="Amiri" pitchFamily="2" charset="-78"/>
               </a:rPr>
               <a:t>لَيْسَتْ</a:t>
@@ -34659,6 +34874,7 @@
                   <a:srgbClr val="1B3B6F"/>
                 </a:solidFill>
                 <a:latin typeface="Amiri" pitchFamily="2" charset="-78"/>
+                <a:ea typeface="Amiri" pitchFamily="2" charset="-78"/>
                 <a:cs typeface="Amiri" pitchFamily="2" charset="-78"/>
               </a:rPr>
               <a:t>يُوجَدُ · تُوجَدُ</a:t>
@@ -34816,6 +35032,7 @@
                   <a:srgbClr val="1B3B6F"/>
                 </a:solidFill>
                 <a:latin typeface="Amiri" pitchFamily="2" charset="-78"/>
+                <a:ea typeface="Amiri" pitchFamily="2" charset="-78"/>
                 <a:cs typeface="Amiri" pitchFamily="2" charset="-78"/>
               </a:rPr>
               <a:t>لَا يُوجَدُ</a:t>
@@ -35081,6 +35298,7 @@
                   <a:srgbClr val="1B3B6F"/>
                 </a:solidFill>
                 <a:latin typeface="Amiri" pitchFamily="2" charset="-78"/>
+                <a:ea typeface="Amiri" pitchFamily="2" charset="-78"/>
                 <a:cs typeface="Amiri" pitchFamily="2" charset="-78"/>
               </a:rPr>
               <a:t>نَسْتَعْمِلُهُ · نَسْتَعْمِلُهَا</a:t>
@@ -35400,6 +35618,7 @@
                   <a:srgbClr val="1B3B6F"/>
                 </a:solidFill>
                 <a:latin typeface="Amiri" pitchFamily="2" charset="-78"/>
+                <a:ea typeface="Amiri" pitchFamily="2" charset="-78"/>
                 <a:cs typeface="Amiri" pitchFamily="2" charset="-78"/>
               </a:rPr>
               <a:t>أَحْمَرُ · حَمْرَاءُ</a:t>
@@ -35557,6 +35776,7 @@
                   <a:srgbClr val="1B3B6F"/>
                 </a:solidFill>
                 <a:latin typeface="Amiri" pitchFamily="2" charset="-78"/>
+                <a:ea typeface="Amiri" pitchFamily="2" charset="-78"/>
                 <a:cs typeface="Amiri" pitchFamily="2" charset="-78"/>
               </a:rPr>
               <a:t>بُنِّيٌّ · بُنِّيَّةٌ</a:t>
@@ -35660,6 +35880,7 @@
                   <a:srgbClr val="1B3B6F"/>
                 </a:solidFill>
                 <a:latin typeface="Amiri" pitchFamily="2" charset="-78"/>
+                <a:ea typeface="Amiri" pitchFamily="2" charset="-78"/>
                 <a:cs typeface="Amiri" pitchFamily="2" charset="-78"/>
               </a:rPr>
               <a:t>أَزْرَقُ · زَرْقَاءُ</a:t>
@@ -35793,6 +36014,7 @@
                   <a:srgbClr val="D4AF37"/>
                 </a:solidFill>
                 <a:latin typeface="Amiri" pitchFamily="2" charset="-78"/>
+                <a:ea typeface="Amiri" pitchFamily="2" charset="-78"/>
                 <a:cs typeface="Amiri" pitchFamily="2" charset="-78"/>
               </a:rPr>
               <a:t>م</a:t>
@@ -36113,6 +36335,7 @@
                   <a:srgbClr val="8A6D1E"/>
                 </a:solidFill>
                 <a:latin typeface="Amiri" pitchFamily="2" charset="-78"/>
+                <a:ea typeface="Amiri" pitchFamily="2" charset="-78"/>
                 <a:cs typeface="Amiri" pitchFamily="2" charset="-78"/>
               </a:rPr>
               <a:t>بِنْيَاتٌ تَرْفَعُ الدَّرَجَةَ</a:t>
@@ -36416,6 +36639,7 @@
                   <a:srgbClr val="1B3B6F"/>
                 </a:solidFill>
                 <a:latin typeface="Amiri" pitchFamily="2" charset="-78"/>
+                <a:ea typeface="Amiri" pitchFamily="2" charset="-78"/>
                 <a:cs typeface="Amiri" pitchFamily="2" charset="-78"/>
               </a:rPr>
               <a:t>أَرْخَصُ مِنْ</a:t>
@@ -36573,6 +36797,7 @@
                   <a:srgbClr val="1B3B6F"/>
                 </a:solidFill>
                 <a:latin typeface="Amiri" pitchFamily="2" charset="-78"/>
+                <a:ea typeface="Amiri" pitchFamily="2" charset="-78"/>
                 <a:cs typeface="Amiri" pitchFamily="2" charset="-78"/>
               </a:rPr>
               <a:t>بِكَمْ؟</a:t>
@@ -36676,6 +36901,7 @@
                   <a:srgbClr val="1B3B6F"/>
                 </a:solidFill>
                 <a:latin typeface="Amiri" pitchFamily="2" charset="-78"/>
+                <a:ea typeface="Amiri" pitchFamily="2" charset="-78"/>
                 <a:cs typeface="Amiri" pitchFamily="2" charset="-78"/>
               </a:rPr>
               <a:t>أَغْلَى</a:t>
@@ -36941,6 +37167,7 @@
                   <a:srgbClr val="1B3B6F"/>
                 </a:solidFill>
                 <a:latin typeface="Amiri" pitchFamily="2" charset="-78"/>
+                <a:ea typeface="Amiri" pitchFamily="2" charset="-78"/>
                 <a:cs typeface="Amiri" pitchFamily="2" charset="-78"/>
               </a:rPr>
               <a:t>أَسْتَطِيعُ أَنْ أَسْبَحَ</a:t>
@@ -37098,6 +37325,7 @@
                   <a:srgbClr val="1B3B6F"/>
                 </a:solidFill>
                 <a:latin typeface="Amiri" pitchFamily="2" charset="-78"/>
+                <a:ea typeface="Amiri" pitchFamily="2" charset="-78"/>
                 <a:cs typeface="Amiri" pitchFamily="2" charset="-78"/>
               </a:rPr>
               <a:t>لَا أَسْتَطِيعُ أَنْ أَعْزِفَ</a:t>
@@ -37363,6 +37591,7 @@
                   <a:srgbClr val="1B3B6F"/>
                 </a:solidFill>
                 <a:latin typeface="Amiri" pitchFamily="2" charset="-78"/>
+                <a:ea typeface="Amiri" pitchFamily="2" charset="-78"/>
                 <a:cs typeface="Amiri" pitchFamily="2" charset="-78"/>
               </a:rPr>
               <a:t>أَدْعُوكَ إِلَى حَفْلَتِي</a:t>
@@ -37520,6 +37749,7 @@
                   <a:srgbClr val="1B3B6F"/>
                 </a:solidFill>
                 <a:latin typeface="Amiri" pitchFamily="2" charset="-78"/>
+                <a:ea typeface="Amiri" pitchFamily="2" charset="-78"/>
                 <a:cs typeface="Amiri" pitchFamily="2" charset="-78"/>
               </a:rPr>
               <a:t>أَدْعُوكُمْ</a:t>
@@ -37623,6 +37853,7 @@
                   <a:srgbClr val="1B3B6F"/>
                 </a:solidFill>
                 <a:latin typeface="Amiri" pitchFamily="2" charset="-78"/>
+                <a:ea typeface="Amiri" pitchFamily="2" charset="-78"/>
                 <a:cs typeface="Amiri" pitchFamily="2" charset="-78"/>
               </a:rPr>
               <a:t>أَدْعُوكِ</a:t>
@@ -37888,6 +38119,7 @@
                   <a:srgbClr val="1B3B6F"/>
                 </a:solidFill>
                 <a:latin typeface="Amiri" pitchFamily="2" charset="-78"/>
+                <a:ea typeface="Amiri" pitchFamily="2" charset="-78"/>
                 <a:cs typeface="Amiri" pitchFamily="2" charset="-78"/>
               </a:rPr>
               <a:t>آسِفٌ، لَا أَسْتَطِيعُ أَنْ آتِيَ</a:t>
@@ -38045,6 +38277,7 @@
                   <a:srgbClr val="1B3B6F"/>
                 </a:solidFill>
                 <a:latin typeface="Amiri" pitchFamily="2" charset="-78"/>
+                <a:ea typeface="Amiri" pitchFamily="2" charset="-78"/>
                 <a:cs typeface="Amiri" pitchFamily="2" charset="-78"/>
               </a:rPr>
               <a:t>آسِفَةٌ</a:t>
@@ -38310,6 +38543,7 @@
                   <a:srgbClr val="1B3B6F"/>
                 </a:solidFill>
                 <a:latin typeface="Amiri" pitchFamily="2" charset="-78"/>
+                <a:ea typeface="Amiri" pitchFamily="2" charset="-78"/>
                 <a:cs typeface="Amiri" pitchFamily="2" charset="-78"/>
               </a:rPr>
               <a:t>أَوَّلًا · ثُمَّ · أَخِيرًا</a:t>
@@ -38629,6 +38863,7 @@
                   <a:srgbClr val="1B3B6F"/>
                 </a:solidFill>
                 <a:latin typeface="Amiri" pitchFamily="2" charset="-78"/>
+                <a:ea typeface="Amiri" pitchFamily="2" charset="-78"/>
                 <a:cs typeface="Amiri" pitchFamily="2" charset="-78"/>
               </a:rPr>
               <a:t>صَحِيحٌ أَنَّ … غَيْرَ أَنَّ …</a:t>
@@ -38816,6 +39051,7 @@
                   <a:srgbClr val="D4AF37"/>
                 </a:solidFill>
                 <a:latin typeface="Amiri" pitchFamily="2" charset="-78"/>
+                <a:ea typeface="Amiri" pitchFamily="2" charset="-78"/>
                 <a:cs typeface="Amiri" pitchFamily="2" charset="-78"/>
               </a:rPr>
               <a:t>م</a:t>
@@ -39136,6 +39372,7 @@
                   <a:srgbClr val="8A6D1E"/>
                 </a:solidFill>
                 <a:latin typeface="Amiri" pitchFamily="2" charset="-78"/>
+                <a:ea typeface="Amiri" pitchFamily="2" charset="-78"/>
                 <a:cs typeface="Amiri" pitchFamily="2" charset="-78"/>
               </a:rPr>
               <a:t>فِي الغُرَفِ</a:t>
@@ -40312,6 +40549,7 @@
                   <a:srgbClr val="1B3B6F"/>
                 </a:solidFill>
                 <a:latin typeface="Amiri" pitchFamily="2" charset="-78"/>
+                <a:ea typeface="Amiri" pitchFamily="2" charset="-78"/>
                 <a:cs typeface="Amiri" pitchFamily="2" charset="-78"/>
               </a:rPr>
               <a:t>دَوْرُكَ!</a:t>
@@ -40388,6 +40626,7 @@
                   <a:srgbClr val="1B3B6F"/>
                 </a:solidFill>
                 <a:latin typeface="Amiri" pitchFamily="2" charset="-78"/>
+                <a:ea typeface="Amiri" pitchFamily="2" charset="-78"/>
                 <a:cs typeface="Amiri" pitchFamily="2" charset="-78"/>
               </a:rPr>
               <a:t>أَحْسَنْتَ! / أَحْسَنْتِ!</a:t>
@@ -40464,6 +40703,7 @@
                   <a:srgbClr val="1B3B6F"/>
                 </a:solidFill>
                 <a:latin typeface="Amiri" pitchFamily="2" charset="-78"/>
+                <a:ea typeface="Amiri" pitchFamily="2" charset="-78"/>
                 <a:cs typeface="Amiri" pitchFamily="2" charset="-78"/>
               </a:rPr>
               <a:t>تَكَلَّمْ أَكْثَرَ، مِنْ فَضْلِكَ</a:t>
@@ -40540,6 +40780,7 @@
                   <a:srgbClr val="1B3B6F"/>
                 </a:solidFill>
                 <a:latin typeface="Amiri" pitchFamily="2" charset="-78"/>
+                <a:ea typeface="Amiri" pitchFamily="2" charset="-78"/>
                 <a:cs typeface="Amiri" pitchFamily="2" charset="-78"/>
               </a:rPr>
               <a:t>لِمَاذَا؟</a:t>
@@ -40711,6 +40952,7 @@
                   <a:srgbClr val="D4AF37"/>
                 </a:solidFill>
                 <a:latin typeface="Amiri" pitchFamily="2" charset="-78"/>
+                <a:ea typeface="Amiri" pitchFamily="2" charset="-78"/>
                 <a:cs typeface="Amiri" pitchFamily="2" charset="-78"/>
               </a:rPr>
               <a:t>م</a:t>
@@ -41031,6 +41273,7 @@
                   <a:srgbClr val="8A6D1E"/>
                 </a:solidFill>
                 <a:latin typeface="Amiri" pitchFamily="2" charset="-78"/>
+                <a:ea typeface="Amiri" pitchFamily="2" charset="-78"/>
                 <a:cs typeface="Amiri" pitchFamily="2" charset="-78"/>
               </a:rPr>
               <a:t>فِي بَيْتِ الشَّبَابِ</a:t>
@@ -41311,6 +41554,7 @@
                   <a:srgbClr val="1B3B6F"/>
                 </a:solidFill>
                 <a:latin typeface="Amiri" pitchFamily="2" charset="-78"/>
+                <a:ea typeface="Amiri" pitchFamily="2" charset="-78"/>
                 <a:cs typeface="Amiri" pitchFamily="2" charset="-78"/>
               </a:rPr>
               <a:t>اسْمِي … وَأَنَا …</a:t>
@@ -41387,6 +41631,7 @@
                   <a:srgbClr val="1B3B6F"/>
                 </a:solidFill>
                 <a:latin typeface="Amiri" pitchFamily="2" charset="-78"/>
+                <a:ea typeface="Amiri" pitchFamily="2" charset="-78"/>
                 <a:cs typeface="Amiri" pitchFamily="2" charset="-78"/>
               </a:rPr>
               <a:t>أَهْلًا! مَا اسْمُكَ؟ وَمَا جِنْسِيَّتُكَ؟</a:t>
@@ -41555,6 +41800,7 @@
                   <a:srgbClr val="1B3B6F"/>
                 </a:solidFill>
                 <a:latin typeface="Amiri" pitchFamily="2" charset="-78"/>
+                <a:ea typeface="Amiri" pitchFamily="2" charset="-78"/>
                 <a:cs typeface="Amiri" pitchFamily="2" charset="-78"/>
               </a:rPr>
               <a:t>أَنَا مَعَ …</a:t>
@@ -41631,6 +41877,7 @@
                   <a:srgbClr val="1B3B6F"/>
                 </a:solidFill>
                 <a:latin typeface="Amiri" pitchFamily="2" charset="-78"/>
+                <a:ea typeface="Amiri" pitchFamily="2" charset="-78"/>
                 <a:cs typeface="Amiri" pitchFamily="2" charset="-78"/>
               </a:rPr>
               <a:t>مَعَ مَنْ أَنْتَ؟</a:t>
@@ -41799,6 +42046,7 @@
                   <a:srgbClr val="1B3B6F"/>
                 </a:solidFill>
                 <a:latin typeface="Amiri" pitchFamily="2" charset="-78"/>
+                <a:ea typeface="Amiri" pitchFamily="2" charset="-78"/>
                 <a:cs typeface="Amiri" pitchFamily="2" charset="-78"/>
               </a:rPr>
               <a:t>غُرْفَةً … فِيهَا …</a:t>
@@ -41875,6 +42123,7 @@
                   <a:srgbClr val="1B3B6F"/>
                 </a:solidFill>
                 <a:latin typeface="Amiri" pitchFamily="2" charset="-78"/>
+                <a:ea typeface="Amiri" pitchFamily="2" charset="-78"/>
                 <a:cs typeface="Amiri" pitchFamily="2" charset="-78"/>
               </a:rPr>
               <a:t>أَيَّ غُرْفَةٍ تُرِيدُ؟</a:t>
@@ -42043,6 +42292,7 @@
                   <a:srgbClr val="1B3B6F"/>
                 </a:solidFill>
                 <a:latin typeface="Amiri" pitchFamily="2" charset="-78"/>
+                <a:ea typeface="Amiri" pitchFamily="2" charset="-78"/>
                 <a:cs typeface="Amiri" pitchFamily="2" charset="-78"/>
               </a:rPr>
               <a:t>حَقِيبَتِي … وَعَلَيْهَا …</a:t>
@@ -42119,6 +42369,7 @@
                   <a:srgbClr val="1B3B6F"/>
                 </a:solidFill>
                 <a:latin typeface="Amiri" pitchFamily="2" charset="-78"/>
+                <a:ea typeface="Amiri" pitchFamily="2" charset="-78"/>
                 <a:cs typeface="Amiri" pitchFamily="2" charset="-78"/>
               </a:rPr>
               <a:t>كَيْفَ أَعْرِفُ حَقِيبَتَكَ فِي المَخْزَنِ؟</a:t>
@@ -42287,6 +42538,7 @@
                   <a:srgbClr val="1B3B6F"/>
                 </a:solidFill>
                 <a:latin typeface="Amiri" pitchFamily="2" charset="-78"/>
+                <a:ea typeface="Amiri" pitchFamily="2" charset="-78"/>
                 <a:cs typeface="Amiri" pitchFamily="2" charset="-78"/>
               </a:rPr>
               <a:t>أُحِبُّ … لِأَنَّ …</a:t>
@@ -42363,6 +42615,7 @@
                   <a:srgbClr val="1B3B6F"/>
                 </a:solidFill>
                 <a:latin typeface="Amiri" pitchFamily="2" charset="-78"/>
+                <a:ea typeface="Amiri" pitchFamily="2" charset="-78"/>
                 <a:cs typeface="Amiri" pitchFamily="2" charset="-78"/>
               </a:rPr>
               <a:t>مَاذَا تُحِبُّ أَنْ تَفْعَلَ فِي المَدِينَةِ؟</a:t>
@@ -42637,6 +42890,7 @@
                   <a:srgbClr val="D4AF37"/>
                 </a:solidFill>
                 <a:latin typeface="Amiri" pitchFamily="2" charset="-78"/>
+                <a:ea typeface="Amiri" pitchFamily="2" charset="-78"/>
                 <a:cs typeface="Amiri" pitchFamily="2" charset="-78"/>
               </a:rPr>
               <a:t>م</a:t>
@@ -42957,6 +43211,7 @@
                   <a:srgbClr val="8A6D1E"/>
                 </a:solidFill>
                 <a:latin typeface="Amiri" pitchFamily="2" charset="-78"/>
+                <a:ea typeface="Amiri" pitchFamily="2" charset="-78"/>
                 <a:cs typeface="Amiri" pitchFamily="2" charset="-78"/>
               </a:rPr>
               <a:t>هَدِيَّةٌ لِأُخْتِي</a:t>
@@ -43237,6 +43492,7 @@
                   <a:srgbClr val="1B3B6F"/>
                 </a:solidFill>
                 <a:latin typeface="Amiri" pitchFamily="2" charset="-78"/>
+                <a:ea typeface="Amiri" pitchFamily="2" charset="-78"/>
                 <a:cs typeface="Amiri" pitchFamily="2" charset="-78"/>
               </a:rPr>
               <a:t>أُرِيدُ هَدِيَّةً لِأُخْتِي، لِأَنَّ …</a:t>
@@ -43313,6 +43569,7 @@
                   <a:srgbClr val="1B3B6F"/>
                 </a:solidFill>
                 <a:latin typeface="Amiri" pitchFamily="2" charset="-78"/>
+                <a:ea typeface="Amiri" pitchFamily="2" charset="-78"/>
                 <a:cs typeface="Amiri" pitchFamily="2" charset="-78"/>
               </a:rPr>
               <a:t>أَهْلًا، تَفَضَّلْ.</a:t>
@@ -43481,6 +43738,7 @@
                   <a:srgbClr val="1B3B6F"/>
                 </a:solidFill>
                 <a:latin typeface="Amiri" pitchFamily="2" charset="-78"/>
+                <a:ea typeface="Amiri" pitchFamily="2" charset="-78"/>
                 <a:cs typeface="Amiri" pitchFamily="2" charset="-78"/>
               </a:rPr>
               <a:t>عُمْرُهَا … وَتُحِبُّ …</a:t>
@@ -43557,6 +43815,7 @@
                   <a:srgbClr val="1B3B6F"/>
                 </a:solidFill>
                 <a:latin typeface="Amiri" pitchFamily="2" charset="-78"/>
+                <a:ea typeface="Amiri" pitchFamily="2" charset="-78"/>
                 <a:cs typeface="Amiri" pitchFamily="2" charset="-78"/>
               </a:rPr>
               <a:t>كَمْ عُمْرُهَا؟ وَمَاذَا تُحِبُّ؟</a:t>
@@ -43725,6 +43984,7 @@
                   <a:srgbClr val="1B3B6F"/>
                 </a:solidFill>
                 <a:latin typeface="Amiri" pitchFamily="2" charset="-78"/>
+                <a:ea typeface="Amiri" pitchFamily="2" charset="-78"/>
                 <a:cs typeface="Amiri" pitchFamily="2" charset="-78"/>
               </a:rPr>
               <a:t>بِكَمْ …؟ … أَرْخَصُ مِنْ …</a:t>
@@ -43801,6 +44061,7 @@
                   <a:srgbClr val="1B3B6F"/>
                 </a:solidFill>
                 <a:latin typeface="Amiri" pitchFamily="2" charset="-78"/>
+                <a:ea typeface="Amiri" pitchFamily="2" charset="-78"/>
                 <a:cs typeface="Amiri" pitchFamily="2" charset="-78"/>
               </a:rPr>
               <a:t>عِنْدَنَا هٰذِهِ الحَقِيبَةُ الوَرْدِيَّةُ وَتِلْكَ الحَقِيبَةُ البَيْضَاءُ.</a:t>
@@ -43904,6 +44165,7 @@
                   <a:srgbClr val="1B3B6F"/>
                 </a:solidFill>
                 <a:latin typeface="Amiri" pitchFamily="2" charset="-78"/>
+                <a:ea typeface="Amiri" pitchFamily="2" charset="-78"/>
                 <a:cs typeface="Amiri" pitchFamily="2" charset="-78"/>
               </a:rPr>
               <a:t>نَعَمْ، مِنْ فَضْلِكَ، بِوَرَقٍ …</a:t>
@@ -43980,6 +44242,7 @@
                   <a:srgbClr val="1B3B6F"/>
                 </a:solidFill>
                 <a:latin typeface="Amiri" pitchFamily="2" charset="-78"/>
+                <a:ea typeface="Amiri" pitchFamily="2" charset="-78"/>
                 <a:cs typeface="Amiri" pitchFamily="2" charset="-78"/>
               </a:rPr>
               <a:t>هَلْ تُرِيدُ أَنْ نُغَلِّفَهَا؟</a:t>
@@ -44083,6 +44346,7 @@
                   <a:srgbClr val="1B3B6F"/>
                 </a:solidFill>
                 <a:latin typeface="Amiri" pitchFamily="2" charset="-78"/>
+                <a:ea typeface="Amiri" pitchFamily="2" charset="-78"/>
                 <a:cs typeface="Amiri" pitchFamily="2" charset="-78"/>
               </a:rPr>
               <a:t>أَوَّلًا سَنَأْكُلُ … ثُمَّ …</a:t>
@@ -44159,6 +44423,7 @@
                   <a:srgbClr val="1B3B6F"/>
                 </a:solidFill>
                 <a:latin typeface="Amiri" pitchFamily="2" charset="-78"/>
+                <a:ea typeface="Amiri" pitchFamily="2" charset="-78"/>
                 <a:cs typeface="Amiri" pitchFamily="2" charset="-78"/>
               </a:rPr>
               <a:t>كَيْفَ سَتَحْتَفِلُونَ؟</a:t>
@@ -44333,13 +44598,9 @@
     <a:fontScheme name="Office">
       <a:majorFont>
         <a:latin typeface="Calibri Light" panose="020F0302020204030204"/>
-        <a:ea typeface=""/>
-        <a:cs typeface=""/>
-        <a:font script="Jpan" typeface="游ゴシック Light"/>
-        <a:font script="Hang" typeface="맑은 고딕"/>
-        <a:font script="Hans" typeface="等线 Light"/>
-        <a:font script="Hant" typeface="新細明體"/>
-        <a:font script="Arab" typeface="Times New Roman"/>
+        <a:ea typeface="Amiri" pitchFamily="2" charset="-78"/>
+        <a:cs typeface="Amiri" pitchFamily="2" charset="-78"/>
+        <a:font script="Arab" typeface="Amiri"/>
         <a:font script="Hebr" typeface="Times New Roman"/>
         <a:font script="Thai" typeface="Angsana New"/>
         <a:font script="Ethi" typeface="Nyala"/>
@@ -44385,13 +44646,9 @@
       </a:majorFont>
       <a:minorFont>
         <a:latin typeface="Calibri" panose="020F0502020204030204"/>
-        <a:ea typeface=""/>
-        <a:cs typeface=""/>
-        <a:font script="Jpan" typeface="游ゴシック"/>
-        <a:font script="Hang" typeface="맑은 고딕"/>
-        <a:font script="Hans" typeface="等线"/>
-        <a:font script="Hant" typeface="新細明體"/>
-        <a:font script="Arab" typeface="Arial"/>
+        <a:ea typeface="Amiri" pitchFamily="2" charset="-78"/>
+        <a:cs typeface="Amiri" pitchFamily="2" charset="-78"/>
+        <a:font script="Arab" typeface="Amiri"/>
         <a:font script="Hebr" typeface="Arial"/>
         <a:font script="Thai" typeface="Cordia New"/>
         <a:font script="Ethi" typeface="Nyala"/>
